--- a/KIIT2026/[KIIT2026]_Poster.pptx
+++ b/KIIT2026/[KIIT2026]_Poster.pptx
@@ -114,6 +114,11 @@
       </a:defRPr>
     </a:lvl9pPr>
   </p:defaultTextStyle>
+  <p:extLst>
+    <p:ext uri="{EFAFB233-063F-42B5-8137-9DF3F51BA10A}">
+      <p15:sldGuideLst xmlns:p15="http://schemas.microsoft.com/office/powerpoint/2012/main"/>
+    </p:ext>
+  </p:extLst>
 </p:presentation>
 </file>
 
@@ -199,7 +204,7 @@
           <a:p>
             <a:fld id="{432792D4-2236-4BCC-82B9-EFDE4237D23D}" type="datetimeFigureOut">
               <a:rPr lang="ko-KR" altLang="en-US" smtClean="0"/>
-              <a:t>2026-05-28</a:t>
+              <a:t>2026-06-02</a:t>
             </a:fld>
             <a:endParaRPr lang="ko-KR" altLang="en-US"/>
           </a:p>
@@ -1269,7 +1274,7 @@
           <a:p>
             <a:fld id="{85C3659E-3EF5-43B6-9757-360D5538E050}" type="datetime1">
               <a:rPr lang="ko-KR" altLang="en-US" smtClean="0"/>
-              <a:t>2026-05-28</a:t>
+              <a:t>2026-06-02</a:t>
             </a:fld>
             <a:endParaRPr lang="ko-KR" altLang="en-US"/>
           </a:p>
@@ -1439,7 +1444,7 @@
           <a:p>
             <a:fld id="{71BDC477-B159-4DF6-BC9B-0E40E37B6545}" type="datetime1">
               <a:rPr lang="ko-KR" altLang="en-US" smtClean="0"/>
-              <a:t>2026-05-28</a:t>
+              <a:t>2026-06-02</a:t>
             </a:fld>
             <a:endParaRPr lang="ko-KR" altLang="en-US"/>
           </a:p>
@@ -1619,7 +1624,7 @@
           <a:p>
             <a:fld id="{EEAF088A-6F59-488E-B75F-C5B0552D843A}" type="datetime1">
               <a:rPr lang="ko-KR" altLang="en-US" smtClean="0"/>
-              <a:t>2026-05-28</a:t>
+              <a:t>2026-06-02</a:t>
             </a:fld>
             <a:endParaRPr lang="ko-KR" altLang="en-US"/>
           </a:p>
@@ -1720,66 +1725,103 @@
           <a:lstStyle>
             <a:lvl1pPr>
               <a:defRPr sz="3600">
+                <a:latin typeface="Calibri" panose="020F0502020204030204" pitchFamily="34" charset="0"/>
+                <a:ea typeface="나눔바른고딕" panose="020B0603020101020101" pitchFamily="50" charset="-127"/>
+                <a:cs typeface="Calibri" panose="020F0502020204030204" pitchFamily="34" charset="0"/>
+              </a:defRPr>
+            </a:lvl1pPr>
+          </a:lstStyle>
+          <a:p>
+            <a:r>
+              <a:rPr lang="ko-KR" altLang="en-US" dirty="0"/>
+              <a:t>마스터 제목 스타일 편집</a:t>
+            </a:r>
+            <a:endParaRPr lang="en-US" dirty="0"/>
+          </a:p>
+        </p:txBody>
+      </p:sp>
+      <p:sp>
+        <p:nvSpPr>
+          <p:cNvPr id="3" name="Content Placeholder 2"/>
+          <p:cNvSpPr>
+            <a:spLocks noGrp="1"/>
+          </p:cNvSpPr>
+          <p:nvPr>
+            <p:ph idx="1"/>
+          </p:nvPr>
+        </p:nvSpPr>
+        <p:spPr>
+          <a:xfrm>
+            <a:off x="191182" y="1337738"/>
+            <a:ext cx="8543925" cy="4351338"/>
+          </a:xfrm>
+        </p:spPr>
+        <p:txBody>
+          <a:bodyPr/>
+          <a:lstStyle>
+            <a:lvl1pPr>
+              <a:defRPr>
                 <a:latin typeface="나눔바른고딕" panose="020B0603020101020101" pitchFamily="50" charset="-127"/>
                 <a:ea typeface="나눔바른고딕" panose="020B0603020101020101" pitchFamily="50" charset="-127"/>
               </a:defRPr>
             </a:lvl1pPr>
+            <a:lvl2pPr>
+              <a:defRPr>
+                <a:latin typeface="나눔바른고딕" panose="020B0603020101020101" pitchFamily="50" charset="-127"/>
+                <a:ea typeface="나눔바른고딕" panose="020B0603020101020101" pitchFamily="50" charset="-127"/>
+              </a:defRPr>
+            </a:lvl2pPr>
+            <a:lvl3pPr>
+              <a:defRPr>
+                <a:latin typeface="나눔바른고딕" panose="020B0603020101020101" pitchFamily="50" charset="-127"/>
+                <a:ea typeface="나눔바른고딕" panose="020B0603020101020101" pitchFamily="50" charset="-127"/>
+              </a:defRPr>
+            </a:lvl3pPr>
+            <a:lvl4pPr>
+              <a:defRPr>
+                <a:latin typeface="나눔바른고딕" panose="020B0603020101020101" pitchFamily="50" charset="-127"/>
+                <a:ea typeface="나눔바른고딕" panose="020B0603020101020101" pitchFamily="50" charset="-127"/>
+              </a:defRPr>
+            </a:lvl4pPr>
+            <a:lvl5pPr>
+              <a:defRPr>
+                <a:latin typeface="나눔바른고딕" panose="020B0603020101020101" pitchFamily="50" charset="-127"/>
+                <a:ea typeface="나눔바른고딕" panose="020B0603020101020101" pitchFamily="50" charset="-127"/>
+              </a:defRPr>
+            </a:lvl5pPr>
           </a:lstStyle>
           <a:p>
+            <a:pPr lvl="0"/>
             <a:r>
               <a:rPr lang="ko-KR" altLang="en-US" dirty="0"/>
-              <a:t>마스터 제목 스타일 편집</a:t>
-            </a:r>
-            <a:endParaRPr lang="en-US" dirty="0"/>
-          </a:p>
-        </p:txBody>
-      </p:sp>
-      <p:sp>
-        <p:nvSpPr>
-          <p:cNvPr id="3" name="Content Placeholder 2"/>
-          <p:cNvSpPr>
-            <a:spLocks noGrp="1"/>
-          </p:cNvSpPr>
-          <p:nvPr>
-            <p:ph idx="1"/>
-          </p:nvPr>
-        </p:nvSpPr>
-        <p:spPr/>
-        <p:txBody>
-          <a:bodyPr/>
-          <a:lstStyle/>
-          <a:p>
-            <a:pPr lvl="0"/>
-            <a:r>
-              <a:rPr lang="ko-KR" altLang="en-US"/>
               <a:t>마스터 텍스트 스타일을 편집하려면 클릭</a:t>
             </a:r>
           </a:p>
           <a:p>
             <a:pPr lvl="1"/>
             <a:r>
-              <a:rPr lang="ko-KR" altLang="en-US"/>
+              <a:rPr lang="ko-KR" altLang="en-US" dirty="0"/>
               <a:t>두 번째 수준</a:t>
             </a:r>
           </a:p>
           <a:p>
             <a:pPr lvl="2"/>
             <a:r>
-              <a:rPr lang="ko-KR" altLang="en-US"/>
+              <a:rPr lang="ko-KR" altLang="en-US" dirty="0"/>
               <a:t>세 번째 수준</a:t>
             </a:r>
           </a:p>
           <a:p>
             <a:pPr lvl="3"/>
             <a:r>
-              <a:rPr lang="ko-KR" altLang="en-US"/>
+              <a:rPr lang="ko-KR" altLang="en-US" dirty="0"/>
               <a:t>네 번째 수준</a:t>
             </a:r>
           </a:p>
           <a:p>
             <a:pPr lvl="4"/>
             <a:r>
-              <a:rPr lang="ko-KR" altLang="en-US"/>
+              <a:rPr lang="ko-KR" altLang="en-US" dirty="0"/>
               <a:t>다섯 번째 수준</a:t>
             </a:r>
             <a:endParaRPr lang="en-US" dirty="0"/>
@@ -1803,7 +1845,7 @@
           <a:p>
             <a:fld id="{D479D793-9614-4FD7-BF92-7FE322E30FEA}" type="datetime1">
               <a:rPr lang="ko-KR" altLang="en-US" smtClean="0"/>
-              <a:t>2026-05-28</a:t>
+              <a:t>2026-06-02</a:t>
             </a:fld>
             <a:endParaRPr lang="ko-KR" altLang="en-US" dirty="0"/>
           </a:p>
@@ -2182,7 +2224,7 @@
           <a:p>
             <a:fld id="{A47BFC1C-838A-4466-9422-8BF9AF2FA081}" type="datetime1">
               <a:rPr lang="ko-KR" altLang="en-US" smtClean="0"/>
-              <a:t>2026-05-28</a:t>
+              <a:t>2026-06-02</a:t>
             </a:fld>
             <a:endParaRPr lang="ko-KR" altLang="en-US"/>
           </a:p>
@@ -2414,7 +2456,7 @@
           <a:p>
             <a:fld id="{341E8B52-671E-4487-A8E4-3BE6208BE02A}" type="datetime1">
               <a:rPr lang="ko-KR" altLang="en-US" smtClean="0"/>
-              <a:t>2026-05-28</a:t>
+              <a:t>2026-06-02</a:t>
             </a:fld>
             <a:endParaRPr lang="ko-KR" altLang="en-US"/>
           </a:p>
@@ -2781,7 +2823,7 @@
           <a:p>
             <a:fld id="{4836C8A8-F6E7-4039-9CD9-F5507F459A0B}" type="datetime1">
               <a:rPr lang="ko-KR" altLang="en-US" smtClean="0"/>
-              <a:t>2026-05-28</a:t>
+              <a:t>2026-06-02</a:t>
             </a:fld>
             <a:endParaRPr lang="ko-KR" altLang="en-US"/>
           </a:p>
@@ -2899,7 +2941,7 @@
           <a:p>
             <a:fld id="{41CAA583-9797-4313-8E4D-645DAFA925B8}" type="datetime1">
               <a:rPr lang="ko-KR" altLang="en-US" smtClean="0"/>
-              <a:t>2026-05-28</a:t>
+              <a:t>2026-06-02</a:t>
             </a:fld>
             <a:endParaRPr lang="ko-KR" altLang="en-US"/>
           </a:p>
@@ -2994,7 +3036,7 @@
           <a:p>
             <a:fld id="{48138575-FC2B-4823-A3E0-42A02DD536FE}" type="datetime1">
               <a:rPr lang="ko-KR" altLang="en-US" smtClean="0"/>
-              <a:t>2026-05-28</a:t>
+              <a:t>2026-06-02</a:t>
             </a:fld>
             <a:endParaRPr lang="ko-KR" altLang="en-US"/>
           </a:p>
@@ -3271,7 +3313,7 @@
           <a:p>
             <a:fld id="{A448379A-CC6F-48EF-8215-1518574307A4}" type="datetime1">
               <a:rPr lang="ko-KR" altLang="en-US" smtClean="0"/>
-              <a:t>2026-05-28</a:t>
+              <a:t>2026-06-02</a:t>
             </a:fld>
             <a:endParaRPr lang="ko-KR" altLang="en-US"/>
           </a:p>
@@ -3528,7 +3570,7 @@
           <a:p>
             <a:fld id="{69D58DB6-A440-403A-8AC2-BA283BAD61A2}" type="datetime1">
               <a:rPr lang="ko-KR" altLang="en-US" smtClean="0"/>
-              <a:t>2026-05-28</a:t>
+              <a:t>2026-06-02</a:t>
             </a:fld>
             <a:endParaRPr lang="ko-KR" altLang="en-US"/>
           </a:p>
@@ -3741,7 +3783,7 @@
           <a:p>
             <a:fld id="{CC4CF363-1387-41D6-9B91-910CD48BBD57}" type="datetime1">
               <a:rPr lang="ko-KR" altLang="en-US" smtClean="0"/>
-              <a:t>2026-05-28</a:t>
+              <a:t>2026-06-02</a:t>
             </a:fld>
             <a:endParaRPr lang="ko-KR" altLang="en-US"/>
           </a:p>
@@ -4980,7 +5022,11 @@
           <a:bodyPr/>
           <a:lstStyle/>
           <a:p>
-            <a:endParaRPr lang="ko-KR" altLang="en-US"/>
+            <a:r>
+              <a:rPr lang="en-US" altLang="ko-KR" dirty="0"/>
+              <a:t>Background</a:t>
+            </a:r>
+            <a:endParaRPr lang="ko-KR" altLang="en-US" dirty="0"/>
           </a:p>
         </p:txBody>
       </p:sp>
@@ -5000,12 +5046,131 @@
             <p:ph idx="1"/>
           </p:nvPr>
         </p:nvSpPr>
-        <p:spPr/>
-        <p:txBody>
-          <a:bodyPr/>
-          <a:lstStyle/>
-          <a:p>
-            <a:endParaRPr lang="ko-KR" altLang="en-US"/>
+        <p:spPr>
+          <a:xfrm>
+            <a:off x="191182" y="1225550"/>
+            <a:ext cx="9487390" cy="1897831"/>
+          </a:xfrm>
+        </p:spPr>
+        <p:txBody>
+          <a:bodyPr>
+            <a:normAutofit/>
+          </a:bodyPr>
+          <a:lstStyle/>
+          <a:p>
+            <a:pPr>
+              <a:lnSpc>
+                <a:spcPct val="150000"/>
+              </a:lnSpc>
+            </a:pPr>
+            <a:r>
+              <a:rPr lang="ko-KR" altLang="en-US" sz="2000" dirty="0"/>
+              <a:t>드론 물류 및 </a:t>
+            </a:r>
+            <a:r>
+              <a:rPr lang="en-US" altLang="ko-KR" sz="2000" dirty="0"/>
+              <a:t>UAM </a:t>
+            </a:r>
+            <a:r>
+              <a:rPr lang="ko-KR" altLang="en-US" sz="2000" dirty="0"/>
+              <a:t>실증 확대 → 이</a:t>
+            </a:r>
+            <a:r>
+              <a:rPr lang="en-US" altLang="ko-KR" sz="2000" dirty="0"/>
+              <a:t>·</a:t>
+            </a:r>
+            <a:r>
+              <a:rPr lang="ko-KR" altLang="en-US" sz="2000" dirty="0"/>
+              <a:t>착륙장 </a:t>
+            </a:r>
+            <a:r>
+              <a:rPr lang="ko-KR" altLang="en-US" sz="2000" b="1" dirty="0">
+                <a:solidFill>
+                  <a:srgbClr val="FF0000"/>
+                </a:solidFill>
+              </a:rPr>
+              <a:t>안전 관리</a:t>
+            </a:r>
+            <a:r>
+              <a:rPr lang="ko-KR" altLang="en-US" sz="2000" b="1" dirty="0"/>
+              <a:t> </a:t>
+            </a:r>
+            <a:r>
+              <a:rPr lang="ko-KR" altLang="en-US" sz="2000" dirty="0"/>
+              <a:t>및 </a:t>
+            </a:r>
+            <a:r>
+              <a:rPr lang="ko-KR" altLang="en-US" sz="2000" b="1" dirty="0">
+                <a:solidFill>
+                  <a:srgbClr val="FF0000"/>
+                </a:solidFill>
+              </a:rPr>
+              <a:t>보안 통제 </a:t>
+            </a:r>
+            <a:r>
+              <a:rPr lang="ko-KR" altLang="en-US" sz="2000" dirty="0"/>
+              <a:t>요구 증가</a:t>
+            </a:r>
+            <a:endParaRPr lang="en-US" altLang="ko-KR" sz="2000" dirty="0"/>
+          </a:p>
+          <a:p>
+            <a:pPr>
+              <a:lnSpc>
+                <a:spcPct val="150000"/>
+              </a:lnSpc>
+            </a:pPr>
+            <a:r>
+              <a:rPr lang="ko-KR" altLang="en-US" sz="2000" dirty="0"/>
+              <a:t>수동 모니터링 중심 운영 방식 한계 → </a:t>
+            </a:r>
+            <a:r>
+              <a:rPr lang="ko-KR" altLang="en-US" sz="2000" b="1" dirty="0">
+                <a:solidFill>
+                  <a:srgbClr val="FF0000"/>
+                </a:solidFill>
+              </a:rPr>
+              <a:t>실시간</a:t>
+            </a:r>
+            <a:r>
+              <a:rPr lang="ko-KR" altLang="en-US" sz="2000" dirty="0"/>
+              <a:t> 위험 대응 체계 필요성 증가</a:t>
+            </a:r>
+            <a:endParaRPr lang="en-US" altLang="ko-KR" sz="2000" dirty="0"/>
+          </a:p>
+          <a:p>
+            <a:pPr>
+              <a:lnSpc>
+                <a:spcPct val="150000"/>
+              </a:lnSpc>
+            </a:pPr>
+            <a:r>
+              <a:rPr lang="ko-KR" altLang="en-US" sz="2000" dirty="0"/>
+              <a:t>항공 안전 수준에 부합하는 </a:t>
+            </a:r>
+            <a:r>
+              <a:rPr lang="ko-KR" altLang="en-US" sz="2000" b="1" dirty="0">
+                <a:solidFill>
+                  <a:srgbClr val="FF0000"/>
+                </a:solidFill>
+              </a:rPr>
+              <a:t>접근 통제 </a:t>
+            </a:r>
+            <a:r>
+              <a:rPr lang="ko-KR" altLang="en-US" sz="2000" dirty="0"/>
+              <a:t>및 </a:t>
+            </a:r>
+            <a:r>
+              <a:rPr lang="ko-KR" altLang="en-US" sz="2000" b="1" dirty="0">
+                <a:solidFill>
+                  <a:srgbClr val="FF0000"/>
+                </a:solidFill>
+              </a:rPr>
+              <a:t>상황 감지 인프라 </a:t>
+            </a:r>
+            <a:r>
+              <a:rPr lang="ko-KR" altLang="en-US" sz="2000" dirty="0"/>
+              <a:t>확보 필요성 증가</a:t>
+            </a:r>
           </a:p>
         </p:txBody>
       </p:sp>
@@ -5034,10 +5199,430 @@
               <a:rPr lang="ko-KR" altLang="en-US" smtClean="0"/>
               <a:t>2</a:t>
             </a:fld>
-            <a:endParaRPr lang="ko-KR" altLang="en-US"/>
-          </a:p>
-        </p:txBody>
-      </p:sp>
+            <a:endParaRPr lang="ko-KR" altLang="en-US" dirty="0"/>
+          </a:p>
+        </p:txBody>
+      </p:sp>
+      <p:sp>
+        <p:nvSpPr>
+          <p:cNvPr id="7" name="제목 1">
+            <a:extLst>
+              <a:ext uri="{FF2B5EF4-FFF2-40B4-BE49-F238E27FC236}">
+                <a16:creationId xmlns:a16="http://schemas.microsoft.com/office/drawing/2014/main" id="{C4DA9954-FD99-75BB-64A4-C49B08B4B809}"/>
+              </a:ext>
+            </a:extLst>
+          </p:cNvPr>
+          <p:cNvSpPr txBox="1">
+            <a:spLocks/>
+          </p:cNvSpPr>
+          <p:nvPr/>
+        </p:nvSpPr>
+        <p:spPr>
+          <a:xfrm>
+            <a:off x="191182" y="2820037"/>
+            <a:ext cx="6083009" cy="1325563"/>
+          </a:xfrm>
+          <a:prstGeom prst="rect">
+            <a:avLst/>
+          </a:prstGeom>
+        </p:spPr>
+        <p:txBody>
+          <a:bodyPr vert="horz" lIns="91440" tIns="45720" rIns="91440" bIns="45720" rtlCol="0" anchor="ctr">
+            <a:normAutofit/>
+          </a:bodyPr>
+          <a:lstStyle>
+            <a:lvl1pPr algn="l" defTabSz="914400" rtl="0" eaLnBrk="1" latinLnBrk="1" hangingPunct="1">
+              <a:lnSpc>
+                <a:spcPct val="90000"/>
+              </a:lnSpc>
+              <a:spcBef>
+                <a:spcPct val="0"/>
+              </a:spcBef>
+              <a:buNone/>
+              <a:defRPr sz="3600" kern="1200">
+                <a:solidFill>
+                  <a:schemeClr val="tx1"/>
+                </a:solidFill>
+                <a:latin typeface="Calibri" panose="020F0502020204030204" pitchFamily="34" charset="0"/>
+                <a:ea typeface="나눔바른고딕" panose="020B0603020101020101" pitchFamily="50" charset="-127"/>
+                <a:cs typeface="Calibri" panose="020F0502020204030204" pitchFamily="34" charset="0"/>
+              </a:defRPr>
+            </a:lvl1pPr>
+          </a:lstStyle>
+          <a:p>
+            <a:r>
+              <a:rPr lang="en-US" altLang="ko-KR" dirty="0"/>
+              <a:t>Contributions</a:t>
+            </a:r>
+            <a:endParaRPr lang="ko-KR" altLang="en-US" dirty="0"/>
+          </a:p>
+        </p:txBody>
+      </p:sp>
+      <p:sp>
+        <p:nvSpPr>
+          <p:cNvPr id="8" name="내용 개체 틀 2">
+            <a:extLst>
+              <a:ext uri="{FF2B5EF4-FFF2-40B4-BE49-F238E27FC236}">
+                <a16:creationId xmlns:a16="http://schemas.microsoft.com/office/drawing/2014/main" id="{D7E99663-2C00-D155-CB88-205ACBDE9FA6}"/>
+              </a:ext>
+            </a:extLst>
+          </p:cNvPr>
+          <p:cNvSpPr txBox="1">
+            <a:spLocks/>
+          </p:cNvSpPr>
+          <p:nvPr/>
+        </p:nvSpPr>
+        <p:spPr>
+          <a:xfrm>
+            <a:off x="191182" y="4131533"/>
+            <a:ext cx="9487390" cy="2589943"/>
+          </a:xfrm>
+          <a:prstGeom prst="rect">
+            <a:avLst/>
+          </a:prstGeom>
+        </p:spPr>
+        <p:txBody>
+          <a:bodyPr vert="horz" lIns="91440" tIns="45720" rIns="91440" bIns="45720" rtlCol="0">
+            <a:normAutofit/>
+          </a:bodyPr>
+          <a:lstStyle>
+            <a:lvl1pPr marL="228600" indent="-228600" algn="l" defTabSz="914400" rtl="0" eaLnBrk="1" latinLnBrk="1" hangingPunct="1">
+              <a:lnSpc>
+                <a:spcPct val="90000"/>
+              </a:lnSpc>
+              <a:spcBef>
+                <a:spcPts val="1000"/>
+              </a:spcBef>
+              <a:buFont typeface="Arial" panose="020B0604020202020204" pitchFamily="34" charset="0"/>
+              <a:buChar char="•"/>
+              <a:defRPr sz="2800" kern="1200">
+                <a:solidFill>
+                  <a:schemeClr val="tx1"/>
+                </a:solidFill>
+                <a:latin typeface="나눔바른고딕" panose="020B0603020101020101" pitchFamily="50" charset="-127"/>
+                <a:ea typeface="나눔바른고딕" panose="020B0603020101020101" pitchFamily="50" charset="-127"/>
+                <a:cs typeface="+mn-cs"/>
+              </a:defRPr>
+            </a:lvl1pPr>
+            <a:lvl2pPr marL="685800" indent="-228600" algn="l" defTabSz="914400" rtl="0" eaLnBrk="1" latinLnBrk="1" hangingPunct="1">
+              <a:lnSpc>
+                <a:spcPct val="90000"/>
+              </a:lnSpc>
+              <a:spcBef>
+                <a:spcPts val="500"/>
+              </a:spcBef>
+              <a:buFont typeface="Arial" panose="020B0604020202020204" pitchFamily="34" charset="0"/>
+              <a:buChar char="•"/>
+              <a:defRPr sz="2400" kern="1200">
+                <a:solidFill>
+                  <a:schemeClr val="tx1"/>
+                </a:solidFill>
+                <a:latin typeface="나눔바른고딕" panose="020B0603020101020101" pitchFamily="50" charset="-127"/>
+                <a:ea typeface="나눔바른고딕" panose="020B0603020101020101" pitchFamily="50" charset="-127"/>
+                <a:cs typeface="+mn-cs"/>
+              </a:defRPr>
+            </a:lvl2pPr>
+            <a:lvl3pPr marL="1143000" indent="-228600" algn="l" defTabSz="914400" rtl="0" eaLnBrk="1" latinLnBrk="1" hangingPunct="1">
+              <a:lnSpc>
+                <a:spcPct val="90000"/>
+              </a:lnSpc>
+              <a:spcBef>
+                <a:spcPts val="500"/>
+              </a:spcBef>
+              <a:buFont typeface="Arial" panose="020B0604020202020204" pitchFamily="34" charset="0"/>
+              <a:buChar char="•"/>
+              <a:defRPr sz="2000" kern="1200">
+                <a:solidFill>
+                  <a:schemeClr val="tx1"/>
+                </a:solidFill>
+                <a:latin typeface="나눔바른고딕" panose="020B0603020101020101" pitchFamily="50" charset="-127"/>
+                <a:ea typeface="나눔바른고딕" panose="020B0603020101020101" pitchFamily="50" charset="-127"/>
+                <a:cs typeface="+mn-cs"/>
+              </a:defRPr>
+            </a:lvl3pPr>
+            <a:lvl4pPr marL="1600200" indent="-228600" algn="l" defTabSz="914400" rtl="0" eaLnBrk="1" latinLnBrk="1" hangingPunct="1">
+              <a:lnSpc>
+                <a:spcPct val="90000"/>
+              </a:lnSpc>
+              <a:spcBef>
+                <a:spcPts val="500"/>
+              </a:spcBef>
+              <a:buFont typeface="Arial" panose="020B0604020202020204" pitchFamily="34" charset="0"/>
+              <a:buChar char="•"/>
+              <a:defRPr sz="1800" kern="1200">
+                <a:solidFill>
+                  <a:schemeClr val="tx1"/>
+                </a:solidFill>
+                <a:latin typeface="나눔바른고딕" panose="020B0603020101020101" pitchFamily="50" charset="-127"/>
+                <a:ea typeface="나눔바른고딕" panose="020B0603020101020101" pitchFamily="50" charset="-127"/>
+                <a:cs typeface="+mn-cs"/>
+              </a:defRPr>
+            </a:lvl4pPr>
+            <a:lvl5pPr marL="2057400" indent="-228600" algn="l" defTabSz="914400" rtl="0" eaLnBrk="1" latinLnBrk="1" hangingPunct="1">
+              <a:lnSpc>
+                <a:spcPct val="90000"/>
+              </a:lnSpc>
+              <a:spcBef>
+                <a:spcPts val="500"/>
+              </a:spcBef>
+              <a:buFont typeface="Arial" panose="020B0604020202020204" pitchFamily="34" charset="0"/>
+              <a:buChar char="•"/>
+              <a:defRPr sz="1800" kern="1200">
+                <a:solidFill>
+                  <a:schemeClr val="tx1"/>
+                </a:solidFill>
+                <a:latin typeface="나눔바른고딕" panose="020B0603020101020101" pitchFamily="50" charset="-127"/>
+                <a:ea typeface="나눔바른고딕" panose="020B0603020101020101" pitchFamily="50" charset="-127"/>
+                <a:cs typeface="+mn-cs"/>
+              </a:defRPr>
+            </a:lvl5pPr>
+            <a:lvl6pPr marL="2514600" indent="-228600" algn="l" defTabSz="914400" rtl="0" eaLnBrk="1" latinLnBrk="1" hangingPunct="1">
+              <a:lnSpc>
+                <a:spcPct val="90000"/>
+              </a:lnSpc>
+              <a:spcBef>
+                <a:spcPts val="500"/>
+              </a:spcBef>
+              <a:buFont typeface="Arial" panose="020B0604020202020204" pitchFamily="34" charset="0"/>
+              <a:buChar char="•"/>
+              <a:defRPr sz="1800" kern="1200">
+                <a:solidFill>
+                  <a:schemeClr val="tx1"/>
+                </a:solidFill>
+                <a:latin typeface="+mn-lt"/>
+                <a:ea typeface="+mn-ea"/>
+                <a:cs typeface="+mn-cs"/>
+              </a:defRPr>
+            </a:lvl6pPr>
+            <a:lvl7pPr marL="2971800" indent="-228600" algn="l" defTabSz="914400" rtl="0" eaLnBrk="1" latinLnBrk="1" hangingPunct="1">
+              <a:lnSpc>
+                <a:spcPct val="90000"/>
+              </a:lnSpc>
+              <a:spcBef>
+                <a:spcPts val="500"/>
+              </a:spcBef>
+              <a:buFont typeface="Arial" panose="020B0604020202020204" pitchFamily="34" charset="0"/>
+              <a:buChar char="•"/>
+              <a:defRPr sz="1800" kern="1200">
+                <a:solidFill>
+                  <a:schemeClr val="tx1"/>
+                </a:solidFill>
+                <a:latin typeface="+mn-lt"/>
+                <a:ea typeface="+mn-ea"/>
+                <a:cs typeface="+mn-cs"/>
+              </a:defRPr>
+            </a:lvl7pPr>
+            <a:lvl8pPr marL="3429000" indent="-228600" algn="l" defTabSz="914400" rtl="0" eaLnBrk="1" latinLnBrk="1" hangingPunct="1">
+              <a:lnSpc>
+                <a:spcPct val="90000"/>
+              </a:lnSpc>
+              <a:spcBef>
+                <a:spcPts val="500"/>
+              </a:spcBef>
+              <a:buFont typeface="Arial" panose="020B0604020202020204" pitchFamily="34" charset="0"/>
+              <a:buChar char="•"/>
+              <a:defRPr sz="1800" kern="1200">
+                <a:solidFill>
+                  <a:schemeClr val="tx1"/>
+                </a:solidFill>
+                <a:latin typeface="+mn-lt"/>
+                <a:ea typeface="+mn-ea"/>
+                <a:cs typeface="+mn-cs"/>
+              </a:defRPr>
+            </a:lvl8pPr>
+            <a:lvl9pPr marL="3886200" indent="-228600" algn="l" defTabSz="914400" rtl="0" eaLnBrk="1" latinLnBrk="1" hangingPunct="1">
+              <a:lnSpc>
+                <a:spcPct val="90000"/>
+              </a:lnSpc>
+              <a:spcBef>
+                <a:spcPts val="500"/>
+              </a:spcBef>
+              <a:buFont typeface="Arial" panose="020B0604020202020204" pitchFamily="34" charset="0"/>
+              <a:buChar char="•"/>
+              <a:defRPr sz="1800" kern="1200">
+                <a:solidFill>
+                  <a:schemeClr val="tx1"/>
+                </a:solidFill>
+                <a:latin typeface="+mn-lt"/>
+                <a:ea typeface="+mn-ea"/>
+                <a:cs typeface="+mn-cs"/>
+              </a:defRPr>
+            </a:lvl9pPr>
+          </a:lstStyle>
+          <a:p>
+            <a:pPr>
+              <a:lnSpc>
+                <a:spcPct val="150000"/>
+              </a:lnSpc>
+            </a:pPr>
+            <a:r>
+              <a:rPr lang="ko-KR" altLang="en-US" sz="1800" dirty="0" err="1"/>
+              <a:t>버티포트</a:t>
+            </a:r>
+            <a:r>
+              <a:rPr lang="ko-KR" altLang="en-US" sz="1800" dirty="0"/>
+              <a:t> 환경에 적합한 웹 기반 </a:t>
+            </a:r>
+            <a:r>
+              <a:rPr lang="en-US" altLang="ko-KR" sz="1800" dirty="0"/>
+              <a:t>CCTV </a:t>
+            </a:r>
+            <a:r>
+              <a:rPr lang="ko-KR" altLang="en-US" sz="1800" dirty="0"/>
+              <a:t>통합 관제 시스템 설계 및 구현 방법 제안</a:t>
+            </a:r>
+            <a:endParaRPr lang="en-US" altLang="ko-KR" sz="1800" dirty="0"/>
+          </a:p>
+          <a:p>
+            <a:pPr>
+              <a:lnSpc>
+                <a:spcPct val="150000"/>
+              </a:lnSpc>
+            </a:pPr>
+            <a:r>
+              <a:rPr lang="en-US" altLang="ko-KR" sz="1800" dirty="0"/>
+              <a:t>RTSP </a:t>
+            </a:r>
+            <a:r>
+              <a:rPr lang="ko-KR" altLang="en-US" sz="1800" dirty="0"/>
+              <a:t>및 </a:t>
+            </a:r>
+            <a:r>
+              <a:rPr lang="en-US" altLang="ko-KR" sz="1800" dirty="0"/>
+              <a:t>HLS </a:t>
+            </a:r>
+            <a:r>
+              <a:rPr lang="ko-KR" altLang="en-US" sz="1800" dirty="0"/>
+              <a:t>프로토콜 활용 → 다중 </a:t>
+            </a:r>
+            <a:r>
+              <a:rPr lang="en-US" altLang="ko-KR" sz="1800" dirty="0"/>
+              <a:t>CCTV </a:t>
+            </a:r>
+            <a:r>
+              <a:rPr lang="ko-KR" altLang="en-US" sz="1800" dirty="0"/>
+              <a:t>영상의 저장 및 송출 지원하는 스트리밍 방식 구현</a:t>
+            </a:r>
+            <a:endParaRPr lang="en-US" altLang="ko-KR" sz="1800" dirty="0"/>
+          </a:p>
+          <a:p>
+            <a:pPr>
+              <a:lnSpc>
+                <a:spcPct val="150000"/>
+              </a:lnSpc>
+            </a:pPr>
+            <a:r>
+              <a:rPr lang="en-US" altLang="ko-KR" sz="1800" dirty="0"/>
+              <a:t>PTZ </a:t>
+            </a:r>
+            <a:r>
+              <a:rPr lang="ko-KR" altLang="en-US" sz="1800" dirty="0"/>
+              <a:t>카메라와  </a:t>
+            </a:r>
+            <a:r>
+              <a:rPr lang="en-US" altLang="ko-KR" sz="1800" dirty="0"/>
+              <a:t>ONVIF </a:t>
+            </a:r>
+            <a:r>
+              <a:rPr lang="ko-KR" altLang="en-US" sz="1800" dirty="0"/>
+              <a:t>프로토콜 활용 → 제한된 </a:t>
+            </a:r>
+            <a:r>
+              <a:rPr lang="en-US" altLang="ko-KR" sz="1800" dirty="0"/>
+              <a:t>CCTV</a:t>
+            </a:r>
+            <a:r>
+              <a:rPr lang="ko-KR" altLang="en-US" sz="1800" dirty="0"/>
+              <a:t>로 </a:t>
+            </a:r>
+            <a:r>
+              <a:rPr lang="ko-KR" altLang="en-US" sz="1800" dirty="0" err="1"/>
+              <a:t>버티포트</a:t>
+            </a:r>
+            <a:r>
+              <a:rPr lang="ko-KR" altLang="en-US" sz="1800" dirty="0"/>
+              <a:t> 전체를 효율적으로 관제</a:t>
+            </a:r>
+            <a:endParaRPr lang="en-US" altLang="ko-KR" sz="1800" dirty="0"/>
+          </a:p>
+          <a:p>
+            <a:pPr marL="0" indent="450850">
+              <a:lnSpc>
+                <a:spcPct val="150000"/>
+              </a:lnSpc>
+              <a:buNone/>
+            </a:pPr>
+            <a:r>
+              <a:rPr lang="ko-KR" altLang="en-US" sz="2000" b="1" dirty="0"/>
+              <a:t>⇒ </a:t>
+            </a:r>
+            <a:r>
+              <a:rPr lang="ko-KR" altLang="en-US" sz="2000" b="1" dirty="0" err="1"/>
+              <a:t>버티포트</a:t>
+            </a:r>
+            <a:r>
+              <a:rPr lang="ko-KR" altLang="en-US" sz="2000" b="1" dirty="0"/>
+              <a:t> 관제 기준 및 운영 체계 수립을 위한 기술적 기반 제공</a:t>
+            </a:r>
+          </a:p>
+        </p:txBody>
+      </p:sp>
+      <p:cxnSp>
+        <p:nvCxnSpPr>
+          <p:cNvPr id="9" name="직선 연결선 8">
+            <a:extLst>
+              <a:ext uri="{FF2B5EF4-FFF2-40B4-BE49-F238E27FC236}">
+                <a16:creationId xmlns:a16="http://schemas.microsoft.com/office/drawing/2014/main" id="{786A63DC-B080-688F-C30B-573C20915B71}"/>
+              </a:ext>
+            </a:extLst>
+          </p:cNvPr>
+          <p:cNvCxnSpPr>
+            <a:cxnSpLocks/>
+          </p:cNvCxnSpPr>
+          <p:nvPr/>
+        </p:nvCxnSpPr>
+        <p:spPr>
+          <a:xfrm>
+            <a:off x="0" y="3972894"/>
+            <a:ext cx="9906000" cy="0"/>
+          </a:xfrm>
+          <a:prstGeom prst="line">
+            <a:avLst/>
+          </a:prstGeom>
+          <a:ln w="63500" cmpd="thickThin">
+            <a:gradFill flip="none" rotWithShape="1">
+              <a:gsLst>
+                <a:gs pos="0">
+                  <a:schemeClr val="bg2">
+                    <a:lumMod val="90000"/>
+                  </a:schemeClr>
+                </a:gs>
+                <a:gs pos="100000">
+                  <a:schemeClr val="bg2">
+                    <a:lumMod val="10000"/>
+                  </a:schemeClr>
+                </a:gs>
+              </a:gsLst>
+              <a:lin ang="10800000" scaled="1"/>
+              <a:tileRect/>
+            </a:gradFill>
+          </a:ln>
+        </p:spPr>
+        <p:style>
+          <a:lnRef idx="2">
+            <a:schemeClr val="accent1"/>
+          </a:lnRef>
+          <a:fillRef idx="0">
+            <a:schemeClr val="accent1"/>
+          </a:fillRef>
+          <a:effectRef idx="1">
+            <a:schemeClr val="accent1"/>
+          </a:effectRef>
+          <a:fontRef idx="minor">
+            <a:schemeClr val="tx1"/>
+          </a:fontRef>
+        </p:style>
+      </p:cxnSp>
     </p:spTree>
     <p:extLst>
       <p:ext uri="{BB962C8B-B14F-4D97-AF65-F5344CB8AC3E}">
@@ -5089,32 +5674,11 @@
           <a:bodyPr/>
           <a:lstStyle/>
           <a:p>
-            <a:endParaRPr lang="ko-KR" altLang="en-US"/>
-          </a:p>
-        </p:txBody>
-      </p:sp>
-      <p:sp>
-        <p:nvSpPr>
-          <p:cNvPr id="3" name="내용 개체 틀 2">
-            <a:extLst>
-              <a:ext uri="{FF2B5EF4-FFF2-40B4-BE49-F238E27FC236}">
-                <a16:creationId xmlns:a16="http://schemas.microsoft.com/office/drawing/2014/main" id="{A6226524-F09C-860A-38D3-204A51C7138D}"/>
-              </a:ext>
-            </a:extLst>
-          </p:cNvPr>
-          <p:cNvSpPr>
-            <a:spLocks noGrp="1"/>
-          </p:cNvSpPr>
-          <p:nvPr>
-            <p:ph idx="1"/>
-          </p:nvPr>
-        </p:nvSpPr>
-        <p:spPr/>
-        <p:txBody>
-          <a:bodyPr/>
-          <a:lstStyle/>
-          <a:p>
-            <a:endParaRPr lang="ko-KR" altLang="en-US"/>
+            <a:r>
+              <a:rPr lang="en-US" altLang="ko-KR" dirty="0"/>
+              <a:t>System Architecture</a:t>
+            </a:r>
+            <a:endParaRPr lang="ko-KR" altLang="en-US" dirty="0"/>
           </a:p>
         </p:txBody>
       </p:sp>
@@ -5144,6 +5708,2114 @@
               <a:t>3</a:t>
             </a:fld>
             <a:endParaRPr lang="ko-KR" altLang="en-US"/>
+          </a:p>
+        </p:txBody>
+      </p:sp>
+      <p:sp>
+        <p:nvSpPr>
+          <p:cNvPr id="75" name="직사각형 74">
+            <a:extLst>
+              <a:ext uri="{FF2B5EF4-FFF2-40B4-BE49-F238E27FC236}">
+                <a16:creationId xmlns:a16="http://schemas.microsoft.com/office/drawing/2014/main" id="{EC0A36C5-45AA-81AE-72D1-413BC5E3E511}"/>
+              </a:ext>
+            </a:extLst>
+          </p:cNvPr>
+          <p:cNvSpPr/>
+          <p:nvPr/>
+        </p:nvSpPr>
+        <p:spPr>
+          <a:xfrm>
+            <a:off x="4362451" y="454766"/>
+            <a:ext cx="5543550" cy="1051823"/>
+          </a:xfrm>
+          <a:prstGeom prst="rect">
+            <a:avLst/>
+          </a:prstGeom>
+          <a:solidFill>
+            <a:schemeClr val="bg1"/>
+          </a:solidFill>
+          <a:ln>
+            <a:solidFill>
+              <a:schemeClr val="bg1"/>
+            </a:solidFill>
+          </a:ln>
+        </p:spPr>
+        <p:style>
+          <a:lnRef idx="2">
+            <a:schemeClr val="accent1">
+              <a:shade val="15000"/>
+            </a:schemeClr>
+          </a:lnRef>
+          <a:fillRef idx="1">
+            <a:schemeClr val="accent1"/>
+          </a:fillRef>
+          <a:effectRef idx="0">
+            <a:schemeClr val="accent1"/>
+          </a:effectRef>
+          <a:fontRef idx="minor">
+            <a:schemeClr val="lt1"/>
+          </a:fontRef>
+        </p:style>
+        <p:txBody>
+          <a:bodyPr rtlCol="0" anchor="ctr"/>
+          <a:lstStyle/>
+          <a:p>
+            <a:pPr algn="ctr"/>
+            <a:endParaRPr lang="ko-KR" altLang="en-US"/>
+          </a:p>
+        </p:txBody>
+      </p:sp>
+      <p:grpSp>
+        <p:nvGrpSpPr>
+          <p:cNvPr id="76" name="그룹 75">
+            <a:extLst>
+              <a:ext uri="{FF2B5EF4-FFF2-40B4-BE49-F238E27FC236}">
+                <a16:creationId xmlns:a16="http://schemas.microsoft.com/office/drawing/2014/main" id="{70BF5D7C-6E62-715F-5245-FEA99FC85353}"/>
+              </a:ext>
+            </a:extLst>
+          </p:cNvPr>
+          <p:cNvGrpSpPr/>
+          <p:nvPr/>
+        </p:nvGrpSpPr>
+        <p:grpSpPr>
+          <a:xfrm>
+            <a:off x="6508371" y="74570"/>
+            <a:ext cx="363051" cy="605902"/>
+            <a:chOff x="3151762" y="794425"/>
+            <a:chExt cx="479898" cy="800911"/>
+          </a:xfrm>
+        </p:grpSpPr>
+        <p:sp>
+          <p:nvSpPr>
+            <p:cNvPr id="77" name="타원 76">
+              <a:extLst>
+                <a:ext uri="{FF2B5EF4-FFF2-40B4-BE49-F238E27FC236}">
+                  <a16:creationId xmlns:a16="http://schemas.microsoft.com/office/drawing/2014/main" id="{50E4CFD6-B5D7-F8B1-6A8D-41247A665711}"/>
+                </a:ext>
+              </a:extLst>
+            </p:cNvPr>
+            <p:cNvSpPr/>
+            <p:nvPr/>
+          </p:nvSpPr>
+          <p:spPr>
+            <a:xfrm>
+              <a:off x="3232825" y="794425"/>
+              <a:ext cx="311286" cy="311286"/>
+            </a:xfrm>
+            <a:prstGeom prst="ellipse">
+              <a:avLst/>
+            </a:prstGeom>
+            <a:solidFill>
+              <a:schemeClr val="bg1"/>
+            </a:solidFill>
+            <a:ln>
+              <a:solidFill>
+                <a:schemeClr val="tx1"/>
+              </a:solidFill>
+            </a:ln>
+          </p:spPr>
+          <p:style>
+            <a:lnRef idx="2">
+              <a:schemeClr val="accent1">
+                <a:shade val="15000"/>
+              </a:schemeClr>
+            </a:lnRef>
+            <a:fillRef idx="1">
+              <a:schemeClr val="accent1"/>
+            </a:fillRef>
+            <a:effectRef idx="0">
+              <a:schemeClr val="accent1"/>
+            </a:effectRef>
+            <a:fontRef idx="minor">
+              <a:schemeClr val="lt1"/>
+            </a:fontRef>
+          </p:style>
+          <p:txBody>
+            <a:bodyPr rtlCol="0" anchor="ctr"/>
+            <a:lstStyle/>
+            <a:p>
+              <a:pPr algn="ctr"/>
+              <a:endParaRPr lang="ko-KR" altLang="en-US">
+                <a:solidFill>
+                  <a:sysClr val="windowText" lastClr="000000"/>
+                </a:solidFill>
+              </a:endParaRPr>
+            </a:p>
+          </p:txBody>
+        </p:sp>
+        <p:cxnSp>
+          <p:nvCxnSpPr>
+            <p:cNvPr id="78" name="직선 연결선 77">
+              <a:extLst>
+                <a:ext uri="{FF2B5EF4-FFF2-40B4-BE49-F238E27FC236}">
+                  <a16:creationId xmlns:a16="http://schemas.microsoft.com/office/drawing/2014/main" id="{25061932-A792-334C-1BB5-9948FB3D35D9}"/>
+                </a:ext>
+              </a:extLst>
+            </p:cNvPr>
+            <p:cNvCxnSpPr>
+              <a:cxnSpLocks/>
+              <a:stCxn id="77" idx="4"/>
+            </p:cNvCxnSpPr>
+            <p:nvPr/>
+          </p:nvCxnSpPr>
+          <p:spPr>
+            <a:xfrm>
+              <a:off x="3388468" y="1105711"/>
+              <a:ext cx="0" cy="337225"/>
+            </a:xfrm>
+            <a:prstGeom prst="line">
+              <a:avLst/>
+            </a:prstGeom>
+            <a:ln>
+              <a:solidFill>
+                <a:schemeClr val="tx1"/>
+              </a:solidFill>
+            </a:ln>
+          </p:spPr>
+          <p:style>
+            <a:lnRef idx="2">
+              <a:schemeClr val="accent1"/>
+            </a:lnRef>
+            <a:fillRef idx="0">
+              <a:schemeClr val="accent1"/>
+            </a:fillRef>
+            <a:effectRef idx="1">
+              <a:schemeClr val="accent1"/>
+            </a:effectRef>
+            <a:fontRef idx="minor">
+              <a:schemeClr val="tx1"/>
+            </a:fontRef>
+          </p:style>
+        </p:cxnSp>
+        <p:cxnSp>
+          <p:nvCxnSpPr>
+            <p:cNvPr id="79" name="직선 연결선 78">
+              <a:extLst>
+                <a:ext uri="{FF2B5EF4-FFF2-40B4-BE49-F238E27FC236}">
+                  <a16:creationId xmlns:a16="http://schemas.microsoft.com/office/drawing/2014/main" id="{2AB5CBE5-06F3-C750-E447-A454F4866294}"/>
+                </a:ext>
+              </a:extLst>
+            </p:cNvPr>
+            <p:cNvCxnSpPr>
+              <a:cxnSpLocks/>
+            </p:cNvCxnSpPr>
+            <p:nvPr/>
+          </p:nvCxnSpPr>
+          <p:spPr>
+            <a:xfrm>
+              <a:off x="3388468" y="1442936"/>
+              <a:ext cx="155643" cy="152400"/>
+            </a:xfrm>
+            <a:prstGeom prst="line">
+              <a:avLst/>
+            </a:prstGeom>
+            <a:ln>
+              <a:solidFill>
+                <a:schemeClr val="tx1"/>
+              </a:solidFill>
+            </a:ln>
+          </p:spPr>
+          <p:style>
+            <a:lnRef idx="2">
+              <a:schemeClr val="accent1"/>
+            </a:lnRef>
+            <a:fillRef idx="0">
+              <a:schemeClr val="accent1"/>
+            </a:fillRef>
+            <a:effectRef idx="1">
+              <a:schemeClr val="accent1"/>
+            </a:effectRef>
+            <a:fontRef idx="minor">
+              <a:schemeClr val="tx1"/>
+            </a:fontRef>
+          </p:style>
+        </p:cxnSp>
+        <p:cxnSp>
+          <p:nvCxnSpPr>
+            <p:cNvPr id="80" name="직선 연결선 79">
+              <a:extLst>
+                <a:ext uri="{FF2B5EF4-FFF2-40B4-BE49-F238E27FC236}">
+                  <a16:creationId xmlns:a16="http://schemas.microsoft.com/office/drawing/2014/main" id="{CDB6612A-CDD0-9EEB-7546-BC3C42532E89}"/>
+                </a:ext>
+              </a:extLst>
+            </p:cNvPr>
+            <p:cNvCxnSpPr>
+              <a:cxnSpLocks/>
+            </p:cNvCxnSpPr>
+            <p:nvPr/>
+          </p:nvCxnSpPr>
+          <p:spPr>
+            <a:xfrm flipH="1">
+              <a:off x="3232825" y="1442936"/>
+              <a:ext cx="155643" cy="152400"/>
+            </a:xfrm>
+            <a:prstGeom prst="line">
+              <a:avLst/>
+            </a:prstGeom>
+            <a:ln>
+              <a:solidFill>
+                <a:schemeClr val="tx1"/>
+              </a:solidFill>
+            </a:ln>
+          </p:spPr>
+          <p:style>
+            <a:lnRef idx="2">
+              <a:schemeClr val="accent1"/>
+            </a:lnRef>
+            <a:fillRef idx="0">
+              <a:schemeClr val="accent1"/>
+            </a:fillRef>
+            <a:effectRef idx="1">
+              <a:schemeClr val="accent1"/>
+            </a:effectRef>
+            <a:fontRef idx="minor">
+              <a:schemeClr val="tx1"/>
+            </a:fontRef>
+          </p:style>
+        </p:cxnSp>
+        <p:cxnSp>
+          <p:nvCxnSpPr>
+            <p:cNvPr id="81" name="직선 연결선 80">
+              <a:extLst>
+                <a:ext uri="{FF2B5EF4-FFF2-40B4-BE49-F238E27FC236}">
+                  <a16:creationId xmlns:a16="http://schemas.microsoft.com/office/drawing/2014/main" id="{5530BD32-C473-E85D-DA52-4EFD0343407F}"/>
+                </a:ext>
+              </a:extLst>
+            </p:cNvPr>
+            <p:cNvCxnSpPr>
+              <a:cxnSpLocks/>
+            </p:cNvCxnSpPr>
+            <p:nvPr/>
+          </p:nvCxnSpPr>
+          <p:spPr>
+            <a:xfrm flipH="1">
+              <a:off x="3151762" y="1314855"/>
+              <a:ext cx="479898" cy="0"/>
+            </a:xfrm>
+            <a:prstGeom prst="line">
+              <a:avLst/>
+            </a:prstGeom>
+            <a:ln>
+              <a:solidFill>
+                <a:schemeClr val="tx1"/>
+              </a:solidFill>
+            </a:ln>
+          </p:spPr>
+          <p:style>
+            <a:lnRef idx="2">
+              <a:schemeClr val="accent1"/>
+            </a:lnRef>
+            <a:fillRef idx="0">
+              <a:schemeClr val="accent1"/>
+            </a:fillRef>
+            <a:effectRef idx="1">
+              <a:schemeClr val="accent1"/>
+            </a:effectRef>
+            <a:fontRef idx="minor">
+              <a:schemeClr val="tx1"/>
+            </a:fontRef>
+          </p:style>
+        </p:cxnSp>
+      </p:grpSp>
+      <p:sp>
+        <p:nvSpPr>
+          <p:cNvPr id="82" name="직사각형 81">
+            <a:extLst>
+              <a:ext uri="{FF2B5EF4-FFF2-40B4-BE49-F238E27FC236}">
+                <a16:creationId xmlns:a16="http://schemas.microsoft.com/office/drawing/2014/main" id="{2E1DFD04-4C11-78DE-3BF6-331B3B1269B1}"/>
+              </a:ext>
+            </a:extLst>
+          </p:cNvPr>
+          <p:cNvSpPr/>
+          <p:nvPr/>
+        </p:nvSpPr>
+        <p:spPr>
+          <a:xfrm>
+            <a:off x="5975963" y="1230813"/>
+            <a:ext cx="1633612" cy="581546"/>
+          </a:xfrm>
+          <a:prstGeom prst="rect">
+            <a:avLst/>
+          </a:prstGeom>
+          <a:solidFill>
+            <a:schemeClr val="bg1"/>
+          </a:solidFill>
+          <a:ln w="12700">
+            <a:solidFill>
+              <a:schemeClr val="bg2">
+                <a:lumMod val="75000"/>
+              </a:schemeClr>
+            </a:solidFill>
+          </a:ln>
+        </p:spPr>
+        <p:style>
+          <a:lnRef idx="2">
+            <a:schemeClr val="accent1">
+              <a:shade val="15000"/>
+            </a:schemeClr>
+          </a:lnRef>
+          <a:fillRef idx="1">
+            <a:schemeClr val="accent1"/>
+          </a:fillRef>
+          <a:effectRef idx="0">
+            <a:schemeClr val="accent1"/>
+          </a:effectRef>
+          <a:fontRef idx="minor">
+            <a:schemeClr val="lt1"/>
+          </a:fontRef>
+        </p:style>
+        <p:txBody>
+          <a:bodyPr rtlCol="0" anchor="ctr"/>
+          <a:lstStyle/>
+          <a:p>
+            <a:pPr algn="ctr"/>
+            <a:r>
+              <a:rPr lang="en-US" altLang="ko-KR" sz="2000" dirty="0">
+                <a:solidFill>
+                  <a:sysClr val="windowText" lastClr="000000"/>
+                </a:solidFill>
+                <a:latin typeface="Calibri" panose="020F0502020204030204" pitchFamily="34" charset="0"/>
+                <a:ea typeface="Calibri" panose="020F0502020204030204" pitchFamily="34" charset="0"/>
+                <a:cs typeface="Calibri" panose="020F0502020204030204" pitchFamily="34" charset="0"/>
+              </a:rPr>
+              <a:t>Frontend</a:t>
+            </a:r>
+          </a:p>
+        </p:txBody>
+      </p:sp>
+      <p:sp>
+        <p:nvSpPr>
+          <p:cNvPr id="83" name="직사각형 82">
+            <a:extLst>
+              <a:ext uri="{FF2B5EF4-FFF2-40B4-BE49-F238E27FC236}">
+                <a16:creationId xmlns:a16="http://schemas.microsoft.com/office/drawing/2014/main" id="{F42C68A1-E0A1-EB22-BF38-4A28DC17EBFA}"/>
+              </a:ext>
+            </a:extLst>
+          </p:cNvPr>
+          <p:cNvSpPr/>
+          <p:nvPr/>
+        </p:nvSpPr>
+        <p:spPr>
+          <a:xfrm>
+            <a:off x="6687443" y="2597775"/>
+            <a:ext cx="1383011" cy="806854"/>
+          </a:xfrm>
+          <a:prstGeom prst="rect">
+            <a:avLst/>
+          </a:prstGeom>
+          <a:solidFill>
+            <a:schemeClr val="bg1"/>
+          </a:solidFill>
+          <a:ln w="12700">
+            <a:solidFill>
+              <a:schemeClr val="bg2">
+                <a:lumMod val="75000"/>
+              </a:schemeClr>
+            </a:solidFill>
+          </a:ln>
+        </p:spPr>
+        <p:style>
+          <a:lnRef idx="2">
+            <a:schemeClr val="accent1">
+              <a:shade val="15000"/>
+            </a:schemeClr>
+          </a:lnRef>
+          <a:fillRef idx="1">
+            <a:schemeClr val="accent1"/>
+          </a:fillRef>
+          <a:effectRef idx="0">
+            <a:schemeClr val="accent1"/>
+          </a:effectRef>
+          <a:fontRef idx="minor">
+            <a:schemeClr val="lt1"/>
+          </a:fontRef>
+        </p:style>
+        <p:txBody>
+          <a:bodyPr rtlCol="0" anchor="ctr"/>
+          <a:lstStyle/>
+          <a:p>
+            <a:pPr algn="ctr"/>
+            <a:r>
+              <a:rPr lang="en-US" altLang="ko-KR" sz="2000" dirty="0">
+                <a:solidFill>
+                  <a:sysClr val="windowText" lastClr="000000"/>
+                </a:solidFill>
+                <a:latin typeface="Calibri" panose="020F0502020204030204" pitchFamily="34" charset="0"/>
+                <a:ea typeface="Calibri" panose="020F0502020204030204" pitchFamily="34" charset="0"/>
+                <a:cs typeface="Calibri" panose="020F0502020204030204" pitchFamily="34" charset="0"/>
+              </a:rPr>
+              <a:t>Application</a:t>
+            </a:r>
+          </a:p>
+        </p:txBody>
+      </p:sp>
+      <p:sp>
+        <p:nvSpPr>
+          <p:cNvPr id="84" name="직사각형 83">
+            <a:extLst>
+              <a:ext uri="{FF2B5EF4-FFF2-40B4-BE49-F238E27FC236}">
+                <a16:creationId xmlns:a16="http://schemas.microsoft.com/office/drawing/2014/main" id="{B20522C1-92B0-0FA2-8886-7D24923948A1}"/>
+              </a:ext>
+            </a:extLst>
+          </p:cNvPr>
+          <p:cNvSpPr/>
+          <p:nvPr/>
+        </p:nvSpPr>
+        <p:spPr>
+          <a:xfrm>
+            <a:off x="5094322" y="4076019"/>
+            <a:ext cx="1220493" cy="712040"/>
+          </a:xfrm>
+          <a:prstGeom prst="rect">
+            <a:avLst/>
+          </a:prstGeom>
+          <a:solidFill>
+            <a:schemeClr val="bg1"/>
+          </a:solidFill>
+          <a:ln w="12700">
+            <a:solidFill>
+              <a:schemeClr val="bg2">
+                <a:lumMod val="75000"/>
+              </a:schemeClr>
+            </a:solidFill>
+          </a:ln>
+        </p:spPr>
+        <p:style>
+          <a:lnRef idx="2">
+            <a:schemeClr val="accent1">
+              <a:shade val="15000"/>
+            </a:schemeClr>
+          </a:lnRef>
+          <a:fillRef idx="1">
+            <a:schemeClr val="accent1"/>
+          </a:fillRef>
+          <a:effectRef idx="0">
+            <a:schemeClr val="accent1"/>
+          </a:effectRef>
+          <a:fontRef idx="minor">
+            <a:schemeClr val="lt1"/>
+          </a:fontRef>
+        </p:style>
+        <p:txBody>
+          <a:bodyPr rtlCol="0" anchor="ctr"/>
+          <a:lstStyle/>
+          <a:p>
+            <a:pPr algn="ctr"/>
+            <a:r>
+              <a:rPr lang="en-US" altLang="ko-KR" sz="2000" dirty="0">
+                <a:solidFill>
+                  <a:sysClr val="windowText" lastClr="000000"/>
+                </a:solidFill>
+                <a:latin typeface="Calibri" panose="020F0502020204030204" pitchFamily="34" charset="0"/>
+                <a:ea typeface="Calibri" panose="020F0502020204030204" pitchFamily="34" charset="0"/>
+                <a:cs typeface="Calibri" panose="020F0502020204030204" pitchFamily="34" charset="0"/>
+              </a:rPr>
+              <a:t>Media</a:t>
+            </a:r>
+          </a:p>
+          <a:p>
+            <a:pPr algn="ctr"/>
+            <a:r>
+              <a:rPr lang="en-US" altLang="ko-KR" sz="2000" dirty="0">
+                <a:solidFill>
+                  <a:sysClr val="windowText" lastClr="000000"/>
+                </a:solidFill>
+                <a:latin typeface="Calibri" panose="020F0502020204030204" pitchFamily="34" charset="0"/>
+                <a:ea typeface="Calibri" panose="020F0502020204030204" pitchFamily="34" charset="0"/>
+                <a:cs typeface="Calibri" panose="020F0502020204030204" pitchFamily="34" charset="0"/>
+              </a:rPr>
+              <a:t>Server</a:t>
+            </a:r>
+            <a:endParaRPr lang="ko-KR" altLang="en-US" sz="2000" dirty="0">
+              <a:solidFill>
+                <a:sysClr val="windowText" lastClr="000000"/>
+              </a:solidFill>
+              <a:latin typeface="Calibri" panose="020F0502020204030204" pitchFamily="34" charset="0"/>
+              <a:cs typeface="Calibri" panose="020F0502020204030204" pitchFamily="34" charset="0"/>
+            </a:endParaRPr>
+          </a:p>
+        </p:txBody>
+      </p:sp>
+      <p:sp>
+        <p:nvSpPr>
+          <p:cNvPr id="85" name="직사각형 84">
+            <a:extLst>
+              <a:ext uri="{FF2B5EF4-FFF2-40B4-BE49-F238E27FC236}">
+                <a16:creationId xmlns:a16="http://schemas.microsoft.com/office/drawing/2014/main" id="{1246C14A-13AB-E993-9533-38D41B533A70}"/>
+              </a:ext>
+            </a:extLst>
+          </p:cNvPr>
+          <p:cNvSpPr/>
+          <p:nvPr/>
+        </p:nvSpPr>
+        <p:spPr>
+          <a:xfrm>
+            <a:off x="5105400" y="2643145"/>
+            <a:ext cx="1222087" cy="712971"/>
+          </a:xfrm>
+          <a:prstGeom prst="rect">
+            <a:avLst/>
+          </a:prstGeom>
+          <a:solidFill>
+            <a:schemeClr val="bg1"/>
+          </a:solidFill>
+          <a:ln w="12700">
+            <a:solidFill>
+              <a:schemeClr val="bg2">
+                <a:lumMod val="75000"/>
+              </a:schemeClr>
+            </a:solidFill>
+          </a:ln>
+        </p:spPr>
+        <p:style>
+          <a:lnRef idx="2">
+            <a:schemeClr val="accent1">
+              <a:shade val="15000"/>
+            </a:schemeClr>
+          </a:lnRef>
+          <a:fillRef idx="1">
+            <a:schemeClr val="accent1"/>
+          </a:fillRef>
+          <a:effectRef idx="0">
+            <a:schemeClr val="accent1"/>
+          </a:effectRef>
+          <a:fontRef idx="minor">
+            <a:schemeClr val="lt1"/>
+          </a:fontRef>
+        </p:style>
+        <p:txBody>
+          <a:bodyPr rtlCol="0" anchor="ctr"/>
+          <a:lstStyle/>
+          <a:p>
+            <a:pPr algn="ctr"/>
+            <a:r>
+              <a:rPr lang="en-US" altLang="ko-KR" sz="2000" dirty="0">
+                <a:solidFill>
+                  <a:sysClr val="windowText" lastClr="000000"/>
+                </a:solidFill>
+                <a:latin typeface="Calibri" panose="020F0502020204030204" pitchFamily="34" charset="0"/>
+                <a:ea typeface="Calibri" panose="020F0502020204030204" pitchFamily="34" charset="0"/>
+                <a:cs typeface="Calibri" panose="020F0502020204030204" pitchFamily="34" charset="0"/>
+              </a:rPr>
+              <a:t>Database</a:t>
+            </a:r>
+            <a:endParaRPr lang="ko-KR" altLang="en-US" sz="2000" dirty="0">
+              <a:solidFill>
+                <a:sysClr val="windowText" lastClr="000000"/>
+              </a:solidFill>
+              <a:latin typeface="Calibri" panose="020F0502020204030204" pitchFamily="34" charset="0"/>
+              <a:cs typeface="Calibri" panose="020F0502020204030204" pitchFamily="34" charset="0"/>
+            </a:endParaRPr>
+          </a:p>
+        </p:txBody>
+      </p:sp>
+      <p:sp>
+        <p:nvSpPr>
+          <p:cNvPr id="86" name="원통형 85">
+            <a:extLst>
+              <a:ext uri="{FF2B5EF4-FFF2-40B4-BE49-F238E27FC236}">
+                <a16:creationId xmlns:a16="http://schemas.microsoft.com/office/drawing/2014/main" id="{3A9630AC-1C19-0CE7-CA8F-D773848592D0}"/>
+              </a:ext>
+            </a:extLst>
+          </p:cNvPr>
+          <p:cNvSpPr/>
+          <p:nvPr/>
+        </p:nvSpPr>
+        <p:spPr>
+          <a:xfrm>
+            <a:off x="3258447" y="2583629"/>
+            <a:ext cx="1075400" cy="837475"/>
+          </a:xfrm>
+          <a:prstGeom prst="can">
+            <a:avLst/>
+          </a:prstGeom>
+          <a:solidFill>
+            <a:schemeClr val="bg1"/>
+          </a:solidFill>
+          <a:ln w="12700">
+            <a:solidFill>
+              <a:schemeClr val="bg2">
+                <a:lumMod val="75000"/>
+              </a:schemeClr>
+            </a:solidFill>
+          </a:ln>
+        </p:spPr>
+        <p:style>
+          <a:lnRef idx="2">
+            <a:schemeClr val="accent1">
+              <a:shade val="15000"/>
+            </a:schemeClr>
+          </a:lnRef>
+          <a:fillRef idx="1">
+            <a:schemeClr val="accent1"/>
+          </a:fillRef>
+          <a:effectRef idx="0">
+            <a:schemeClr val="accent1"/>
+          </a:effectRef>
+          <a:fontRef idx="minor">
+            <a:schemeClr val="lt1"/>
+          </a:fontRef>
+        </p:style>
+        <p:txBody>
+          <a:bodyPr rtlCol="0" anchor="ctr"/>
+          <a:lstStyle/>
+          <a:p>
+            <a:pPr algn="ctr"/>
+            <a:r>
+              <a:rPr lang="en-US" altLang="ko-KR" sz="2000" dirty="0">
+                <a:solidFill>
+                  <a:sysClr val="windowText" lastClr="000000"/>
+                </a:solidFill>
+              </a:rPr>
+              <a:t>Storage</a:t>
+            </a:r>
+            <a:endParaRPr lang="ko-KR" altLang="en-US" sz="2000" dirty="0">
+              <a:solidFill>
+                <a:sysClr val="windowText" lastClr="000000"/>
+              </a:solidFill>
+            </a:endParaRPr>
+          </a:p>
+        </p:txBody>
+      </p:sp>
+      <p:cxnSp>
+        <p:nvCxnSpPr>
+          <p:cNvPr id="87" name="직선 화살표 연결선 86">
+            <a:extLst>
+              <a:ext uri="{FF2B5EF4-FFF2-40B4-BE49-F238E27FC236}">
+                <a16:creationId xmlns:a16="http://schemas.microsoft.com/office/drawing/2014/main" id="{D9A0694D-3B0F-514C-B7A4-910908A93E63}"/>
+              </a:ext>
+            </a:extLst>
+          </p:cNvPr>
+          <p:cNvCxnSpPr>
+            <a:cxnSpLocks/>
+            <a:stCxn id="85" idx="2"/>
+            <a:endCxn id="84" idx="0"/>
+          </p:cNvCxnSpPr>
+          <p:nvPr/>
+        </p:nvCxnSpPr>
+        <p:spPr>
+          <a:xfrm flipH="1">
+            <a:off x="5704569" y="3356116"/>
+            <a:ext cx="11875" cy="719903"/>
+          </a:xfrm>
+          <a:prstGeom prst="straightConnector1">
+            <a:avLst/>
+          </a:prstGeom>
+          <a:ln w="12700">
+            <a:solidFill>
+              <a:schemeClr val="tx1"/>
+            </a:solidFill>
+            <a:headEnd type="arrow"/>
+            <a:tailEnd type="arrow"/>
+          </a:ln>
+        </p:spPr>
+        <p:style>
+          <a:lnRef idx="2">
+            <a:schemeClr val="accent1"/>
+          </a:lnRef>
+          <a:fillRef idx="0">
+            <a:schemeClr val="accent1"/>
+          </a:fillRef>
+          <a:effectRef idx="1">
+            <a:schemeClr val="accent1"/>
+          </a:effectRef>
+          <a:fontRef idx="minor">
+            <a:schemeClr val="tx1"/>
+          </a:fontRef>
+        </p:style>
+      </p:cxnSp>
+      <p:sp>
+        <p:nvSpPr>
+          <p:cNvPr id="88" name="TextBox 87">
+            <a:extLst>
+              <a:ext uri="{FF2B5EF4-FFF2-40B4-BE49-F238E27FC236}">
+                <a16:creationId xmlns:a16="http://schemas.microsoft.com/office/drawing/2014/main" id="{0AE5EB40-BC7E-2CED-FD65-3C2B19ED571D}"/>
+              </a:ext>
+            </a:extLst>
+          </p:cNvPr>
+          <p:cNvSpPr txBox="1"/>
+          <p:nvPr/>
+        </p:nvSpPr>
+        <p:spPr>
+          <a:xfrm>
+            <a:off x="4950490" y="5115540"/>
+            <a:ext cx="1459164" cy="523220"/>
+          </a:xfrm>
+          <a:prstGeom prst="rect">
+            <a:avLst/>
+          </a:prstGeom>
+          <a:noFill/>
+        </p:spPr>
+        <p:txBody>
+          <a:bodyPr wrap="square" rtlCol="0">
+            <a:spAutoFit/>
+          </a:bodyPr>
+          <a:lstStyle/>
+          <a:p>
+            <a:pPr algn="ctr"/>
+            <a:r>
+              <a:rPr lang="en-US" altLang="ko-KR" sz="1600" dirty="0">
+                <a:latin typeface="Calibri" panose="020F0502020204030204" pitchFamily="34" charset="0"/>
+                <a:ea typeface="Calibri" panose="020F0502020204030204" pitchFamily="34" charset="0"/>
+                <a:cs typeface="Calibri" panose="020F0502020204030204" pitchFamily="34" charset="0"/>
+              </a:rPr>
+              <a:t>Video Stream</a:t>
+            </a:r>
+          </a:p>
+          <a:p>
+            <a:pPr algn="ctr"/>
+            <a:r>
+              <a:rPr lang="en-US" altLang="ko-KR" sz="1200" dirty="0">
+                <a:latin typeface="Calibri" panose="020F0502020204030204" pitchFamily="34" charset="0"/>
+                <a:ea typeface="Calibri" panose="020F0502020204030204" pitchFamily="34" charset="0"/>
+                <a:cs typeface="Calibri" panose="020F0502020204030204" pitchFamily="34" charset="0"/>
+              </a:rPr>
+              <a:t>(RTSP)</a:t>
+            </a:r>
+          </a:p>
+        </p:txBody>
+      </p:sp>
+      <p:sp>
+        <p:nvSpPr>
+          <p:cNvPr id="89" name="TextBox 88">
+            <a:extLst>
+              <a:ext uri="{FF2B5EF4-FFF2-40B4-BE49-F238E27FC236}">
+                <a16:creationId xmlns:a16="http://schemas.microsoft.com/office/drawing/2014/main" id="{D5EBE7F3-B0C2-9D76-6434-DDEA40ED894E}"/>
+              </a:ext>
+            </a:extLst>
+          </p:cNvPr>
+          <p:cNvSpPr txBox="1"/>
+          <p:nvPr/>
+        </p:nvSpPr>
+        <p:spPr>
+          <a:xfrm>
+            <a:off x="3588595" y="3815483"/>
+            <a:ext cx="1537547" cy="584775"/>
+          </a:xfrm>
+          <a:prstGeom prst="rect">
+            <a:avLst/>
+          </a:prstGeom>
+          <a:noFill/>
+        </p:spPr>
+        <p:txBody>
+          <a:bodyPr wrap="square" rtlCol="0">
+            <a:spAutoFit/>
+          </a:bodyPr>
+          <a:lstStyle/>
+          <a:p>
+            <a:pPr algn="ctr"/>
+            <a:r>
+              <a:rPr lang="en-US" altLang="ko-KR" dirty="0">
+                <a:latin typeface="Calibri" panose="020F0502020204030204" pitchFamily="34" charset="0"/>
+                <a:ea typeface="Calibri" panose="020F0502020204030204" pitchFamily="34" charset="0"/>
+                <a:cs typeface="Calibri" panose="020F0502020204030204" pitchFamily="34" charset="0"/>
+              </a:rPr>
+              <a:t>Video File</a:t>
+            </a:r>
+          </a:p>
+          <a:p>
+            <a:pPr algn="ctr"/>
+            <a:r>
+              <a:rPr lang="en-US" altLang="ko-KR" sz="1400" dirty="0">
+                <a:latin typeface="Calibri" panose="020F0502020204030204" pitchFamily="34" charset="0"/>
+                <a:ea typeface="Calibri" panose="020F0502020204030204" pitchFamily="34" charset="0"/>
+                <a:cs typeface="Calibri" panose="020F0502020204030204" pitchFamily="34" charset="0"/>
+              </a:rPr>
+              <a:t>(Persistence)</a:t>
+            </a:r>
+          </a:p>
+        </p:txBody>
+      </p:sp>
+      <p:cxnSp>
+        <p:nvCxnSpPr>
+          <p:cNvPr id="90" name="연결선: 꺾임 89">
+            <a:extLst>
+              <a:ext uri="{FF2B5EF4-FFF2-40B4-BE49-F238E27FC236}">
+                <a16:creationId xmlns:a16="http://schemas.microsoft.com/office/drawing/2014/main" id="{420BE84F-C3EA-D22C-65CB-ECC555E8697B}"/>
+              </a:ext>
+            </a:extLst>
+          </p:cNvPr>
+          <p:cNvCxnSpPr>
+            <a:cxnSpLocks/>
+            <a:stCxn id="84" idx="1"/>
+            <a:endCxn id="86" idx="3"/>
+          </p:cNvCxnSpPr>
+          <p:nvPr/>
+        </p:nvCxnSpPr>
+        <p:spPr>
+          <a:xfrm rot="10800000">
+            <a:off x="3796148" y="3421105"/>
+            <a:ext cx="1298175" cy="1010935"/>
+          </a:xfrm>
+          <a:prstGeom prst="bentConnector2">
+            <a:avLst/>
+          </a:prstGeom>
+          <a:ln w="12700">
+            <a:solidFill>
+              <a:schemeClr val="tx1"/>
+            </a:solidFill>
+            <a:headEnd w="med" len="lg"/>
+            <a:tailEnd type="arrow"/>
+          </a:ln>
+        </p:spPr>
+        <p:style>
+          <a:lnRef idx="2">
+            <a:schemeClr val="accent1"/>
+          </a:lnRef>
+          <a:fillRef idx="0">
+            <a:schemeClr val="accent1"/>
+          </a:fillRef>
+          <a:effectRef idx="1">
+            <a:schemeClr val="accent1"/>
+          </a:effectRef>
+          <a:fontRef idx="minor">
+            <a:schemeClr val="tx1"/>
+          </a:fontRef>
+        </p:style>
+      </p:cxnSp>
+      <p:sp>
+        <p:nvSpPr>
+          <p:cNvPr id="91" name="TextBox 90">
+            <a:extLst>
+              <a:ext uri="{FF2B5EF4-FFF2-40B4-BE49-F238E27FC236}">
+                <a16:creationId xmlns:a16="http://schemas.microsoft.com/office/drawing/2014/main" id="{1CBF2072-349C-45E9-B7EC-6840BE31E28F}"/>
+              </a:ext>
+            </a:extLst>
+          </p:cNvPr>
+          <p:cNvSpPr txBox="1"/>
+          <p:nvPr/>
+        </p:nvSpPr>
+        <p:spPr>
+          <a:xfrm>
+            <a:off x="7266019" y="5109230"/>
+            <a:ext cx="1322802" cy="523220"/>
+          </a:xfrm>
+          <a:prstGeom prst="rect">
+            <a:avLst/>
+          </a:prstGeom>
+          <a:noFill/>
+        </p:spPr>
+        <p:txBody>
+          <a:bodyPr wrap="square" rtlCol="0">
+            <a:spAutoFit/>
+          </a:bodyPr>
+          <a:lstStyle/>
+          <a:p>
+            <a:pPr algn="ctr"/>
+            <a:r>
+              <a:rPr lang="en-US" altLang="ko-KR" sz="1600" dirty="0">
+                <a:latin typeface="Calibri" panose="020F0502020204030204" pitchFamily="34" charset="0"/>
+                <a:ea typeface="Calibri" panose="020F0502020204030204" pitchFamily="34" charset="0"/>
+                <a:cs typeface="Calibri" panose="020F0502020204030204" pitchFamily="34" charset="0"/>
+              </a:rPr>
+              <a:t>PTZ Control</a:t>
+            </a:r>
+          </a:p>
+          <a:p>
+            <a:pPr algn="ctr"/>
+            <a:r>
+              <a:rPr lang="en-US" altLang="ko-KR" sz="1200" dirty="0">
+                <a:latin typeface="Calibri" panose="020F0502020204030204" pitchFamily="34" charset="0"/>
+                <a:ea typeface="Calibri" panose="020F0502020204030204" pitchFamily="34" charset="0"/>
+                <a:cs typeface="Calibri" panose="020F0502020204030204" pitchFamily="34" charset="0"/>
+              </a:rPr>
+              <a:t>(ONVIF)</a:t>
+            </a:r>
+            <a:endParaRPr lang="ko-KR" altLang="en-US" sz="1200" dirty="0">
+              <a:latin typeface="Calibri" panose="020F0502020204030204" pitchFamily="34" charset="0"/>
+              <a:cs typeface="Calibri" panose="020F0502020204030204" pitchFamily="34" charset="0"/>
+            </a:endParaRPr>
+          </a:p>
+        </p:txBody>
+      </p:sp>
+      <p:cxnSp>
+        <p:nvCxnSpPr>
+          <p:cNvPr id="92" name="연결선: 꺾임 91">
+            <a:extLst>
+              <a:ext uri="{FF2B5EF4-FFF2-40B4-BE49-F238E27FC236}">
+                <a16:creationId xmlns:a16="http://schemas.microsoft.com/office/drawing/2014/main" id="{85F50C43-1BBD-6C38-3B82-50B8C01BC857}"/>
+              </a:ext>
+            </a:extLst>
+          </p:cNvPr>
+          <p:cNvCxnSpPr>
+            <a:cxnSpLocks/>
+            <a:endCxn id="84" idx="2"/>
+          </p:cNvCxnSpPr>
+          <p:nvPr/>
+        </p:nvCxnSpPr>
+        <p:spPr>
+          <a:xfrm rot="16200000" flipV="1">
+            <a:off x="5560812" y="4931816"/>
+            <a:ext cx="895808" cy="608294"/>
+          </a:xfrm>
+          <a:prstGeom prst="bentConnector3">
+            <a:avLst>
+              <a:gd name="adj1" fmla="val 66481"/>
+            </a:avLst>
+          </a:prstGeom>
+          <a:ln w="12700">
+            <a:solidFill>
+              <a:schemeClr val="tx1"/>
+            </a:solidFill>
+            <a:headEnd w="med" len="lg"/>
+            <a:tailEnd type="arrow"/>
+          </a:ln>
+        </p:spPr>
+        <p:style>
+          <a:lnRef idx="2">
+            <a:schemeClr val="accent1"/>
+          </a:lnRef>
+          <a:fillRef idx="0">
+            <a:schemeClr val="accent1"/>
+          </a:fillRef>
+          <a:effectRef idx="1">
+            <a:schemeClr val="accent1"/>
+          </a:effectRef>
+          <a:fontRef idx="minor">
+            <a:schemeClr val="tx1"/>
+          </a:fontRef>
+        </p:style>
+      </p:cxnSp>
+      <p:cxnSp>
+        <p:nvCxnSpPr>
+          <p:cNvPr id="93" name="직선 화살표 연결선 92">
+            <a:extLst>
+              <a:ext uri="{FF2B5EF4-FFF2-40B4-BE49-F238E27FC236}">
+                <a16:creationId xmlns:a16="http://schemas.microsoft.com/office/drawing/2014/main" id="{11606B48-9EE8-571F-191C-CA451BB2800A}"/>
+              </a:ext>
+            </a:extLst>
+          </p:cNvPr>
+          <p:cNvCxnSpPr>
+            <a:cxnSpLocks/>
+            <a:stCxn id="86" idx="4"/>
+            <a:endCxn id="85" idx="1"/>
+          </p:cNvCxnSpPr>
+          <p:nvPr/>
+        </p:nvCxnSpPr>
+        <p:spPr>
+          <a:xfrm flipV="1">
+            <a:off x="4333847" y="2999631"/>
+            <a:ext cx="771553" cy="2736"/>
+          </a:xfrm>
+          <a:prstGeom prst="straightConnector1">
+            <a:avLst/>
+          </a:prstGeom>
+          <a:ln w="12700">
+            <a:solidFill>
+              <a:schemeClr val="tx1"/>
+            </a:solidFill>
+            <a:headEnd type="arrow"/>
+            <a:tailEnd type="arrow"/>
+          </a:ln>
+        </p:spPr>
+        <p:style>
+          <a:lnRef idx="2">
+            <a:schemeClr val="accent1"/>
+          </a:lnRef>
+          <a:fillRef idx="0">
+            <a:schemeClr val="accent1"/>
+          </a:fillRef>
+          <a:effectRef idx="1">
+            <a:schemeClr val="accent1"/>
+          </a:effectRef>
+          <a:fontRef idx="minor">
+            <a:schemeClr val="tx1"/>
+          </a:fontRef>
+        </p:style>
+      </p:cxnSp>
+      <p:cxnSp>
+        <p:nvCxnSpPr>
+          <p:cNvPr id="94" name="직선 화살표 연결선 93">
+            <a:extLst>
+              <a:ext uri="{FF2B5EF4-FFF2-40B4-BE49-F238E27FC236}">
+                <a16:creationId xmlns:a16="http://schemas.microsoft.com/office/drawing/2014/main" id="{37F3C8A2-61FF-6FA6-C555-3A88396D7447}"/>
+              </a:ext>
+            </a:extLst>
+          </p:cNvPr>
+          <p:cNvCxnSpPr>
+            <a:cxnSpLocks/>
+            <a:stCxn id="83" idx="1"/>
+            <a:endCxn id="85" idx="3"/>
+          </p:cNvCxnSpPr>
+          <p:nvPr/>
+        </p:nvCxnSpPr>
+        <p:spPr>
+          <a:xfrm flipH="1" flipV="1">
+            <a:off x="6327487" y="2999631"/>
+            <a:ext cx="359956" cy="1571"/>
+          </a:xfrm>
+          <a:prstGeom prst="straightConnector1">
+            <a:avLst/>
+          </a:prstGeom>
+          <a:ln w="12700">
+            <a:solidFill>
+              <a:schemeClr val="tx1"/>
+            </a:solidFill>
+            <a:headEnd type="arrow"/>
+            <a:tailEnd type="arrow"/>
+          </a:ln>
+        </p:spPr>
+        <p:style>
+          <a:lnRef idx="2">
+            <a:schemeClr val="accent1"/>
+          </a:lnRef>
+          <a:fillRef idx="0">
+            <a:schemeClr val="accent1"/>
+          </a:fillRef>
+          <a:effectRef idx="1">
+            <a:schemeClr val="accent1"/>
+          </a:effectRef>
+          <a:fontRef idx="minor">
+            <a:schemeClr val="tx1"/>
+          </a:fontRef>
+        </p:style>
+      </p:cxnSp>
+      <p:cxnSp>
+        <p:nvCxnSpPr>
+          <p:cNvPr id="95" name="연결선: 꺾임 94">
+            <a:extLst>
+              <a:ext uri="{FF2B5EF4-FFF2-40B4-BE49-F238E27FC236}">
+                <a16:creationId xmlns:a16="http://schemas.microsoft.com/office/drawing/2014/main" id="{57C53821-49D8-FC1D-C873-DA773044784C}"/>
+              </a:ext>
+            </a:extLst>
+          </p:cNvPr>
+          <p:cNvCxnSpPr>
+            <a:cxnSpLocks/>
+            <a:stCxn id="82" idx="2"/>
+            <a:endCxn id="83" idx="0"/>
+          </p:cNvCxnSpPr>
+          <p:nvPr/>
+        </p:nvCxnSpPr>
+        <p:spPr>
+          <a:xfrm rot="16200000" flipH="1">
+            <a:off x="6693151" y="1911977"/>
+            <a:ext cx="785416" cy="586180"/>
+          </a:xfrm>
+          <a:prstGeom prst="bentConnector3">
+            <a:avLst>
+              <a:gd name="adj1" fmla="val 50000"/>
+            </a:avLst>
+          </a:prstGeom>
+          <a:ln w="12700">
+            <a:solidFill>
+              <a:schemeClr val="tx1"/>
+            </a:solidFill>
+            <a:headEnd type="arrow"/>
+            <a:tailEnd type="arrow"/>
+          </a:ln>
+        </p:spPr>
+        <p:style>
+          <a:lnRef idx="2">
+            <a:schemeClr val="accent1"/>
+          </a:lnRef>
+          <a:fillRef idx="0">
+            <a:schemeClr val="accent1"/>
+          </a:fillRef>
+          <a:effectRef idx="1">
+            <a:schemeClr val="accent1"/>
+          </a:effectRef>
+          <a:fontRef idx="minor">
+            <a:schemeClr val="tx1"/>
+          </a:fontRef>
+        </p:style>
+      </p:cxnSp>
+      <p:grpSp>
+        <p:nvGrpSpPr>
+          <p:cNvPr id="96" name="그룹 95">
+            <a:extLst>
+              <a:ext uri="{FF2B5EF4-FFF2-40B4-BE49-F238E27FC236}">
+                <a16:creationId xmlns:a16="http://schemas.microsoft.com/office/drawing/2014/main" id="{B0DBEE38-3761-B2B0-5FD7-83427E02DF3A}"/>
+              </a:ext>
+            </a:extLst>
+          </p:cNvPr>
+          <p:cNvGrpSpPr/>
+          <p:nvPr/>
+        </p:nvGrpSpPr>
+        <p:grpSpPr>
+          <a:xfrm>
+            <a:off x="6034329" y="5797286"/>
+            <a:ext cx="1541722" cy="750651"/>
+            <a:chOff x="3489428" y="4707473"/>
+            <a:chExt cx="1541722" cy="750651"/>
+          </a:xfrm>
+        </p:grpSpPr>
+        <p:pic>
+          <p:nvPicPr>
+            <p:cNvPr id="97" name="그림 96" descr="CCTV 카메라 문자 모양 솔리드 블랙 일러스트레이션 | 프리미엄 벡터">
+              <a:extLst>
+                <a:ext uri="{FF2B5EF4-FFF2-40B4-BE49-F238E27FC236}">
+                  <a16:creationId xmlns:a16="http://schemas.microsoft.com/office/drawing/2014/main" id="{176C3FB2-DAC8-4277-6F70-AAD4E8725FF8}"/>
+                </a:ext>
+              </a:extLst>
+            </p:cNvPr>
+            <p:cNvPicPr>
+              <a:picLocks noChangeAspect="1"/>
+            </p:cNvPicPr>
+            <p:nvPr/>
+          </p:nvPicPr>
+          <p:blipFill>
+            <a:blip r:embed="rId3"/>
+            <a:stretch>
+              <a:fillRect/>
+            </a:stretch>
+          </p:blipFill>
+          <p:spPr>
+            <a:xfrm>
+              <a:off x="3489428" y="4707473"/>
+              <a:ext cx="750651" cy="750651"/>
+            </a:xfrm>
+            <a:prstGeom prst="rect">
+              <a:avLst/>
+            </a:prstGeom>
+          </p:spPr>
+        </p:pic>
+        <p:sp>
+          <p:nvSpPr>
+            <p:cNvPr id="98" name="TextBox 97">
+              <a:extLst>
+                <a:ext uri="{FF2B5EF4-FFF2-40B4-BE49-F238E27FC236}">
+                  <a16:creationId xmlns:a16="http://schemas.microsoft.com/office/drawing/2014/main" id="{E9E9DC42-A325-8AD2-FB60-7E156E310F15}"/>
+                </a:ext>
+              </a:extLst>
+            </p:cNvPr>
+            <p:cNvSpPr txBox="1"/>
+            <p:nvPr/>
+          </p:nvSpPr>
+          <p:spPr>
+            <a:xfrm>
+              <a:off x="4116750" y="4951503"/>
+              <a:ext cx="914400" cy="338554"/>
+            </a:xfrm>
+            <a:prstGeom prst="rect">
+              <a:avLst/>
+            </a:prstGeom>
+            <a:noFill/>
+          </p:spPr>
+          <p:txBody>
+            <a:bodyPr wrap="square" rtlCol="0">
+              <a:spAutoFit/>
+            </a:bodyPr>
+            <a:lstStyle/>
+            <a:p>
+              <a:pPr algn="ctr"/>
+              <a:r>
+                <a:rPr lang="en-US" altLang="ko-KR" sz="1600" dirty="0">
+                  <a:latin typeface="Calibri" panose="020F0502020204030204" pitchFamily="34" charset="0"/>
+                  <a:ea typeface="Calibri" panose="020F0502020204030204" pitchFamily="34" charset="0"/>
+                  <a:cs typeface="Calibri" panose="020F0502020204030204" pitchFamily="34" charset="0"/>
+                </a:rPr>
+                <a:t>CCTV</a:t>
+              </a:r>
+              <a:endParaRPr lang="ko-KR" altLang="en-US" sz="1600" dirty="0">
+                <a:latin typeface="Calibri" panose="020F0502020204030204" pitchFamily="34" charset="0"/>
+                <a:cs typeface="Calibri" panose="020F0502020204030204" pitchFamily="34" charset="0"/>
+              </a:endParaRPr>
+            </a:p>
+          </p:txBody>
+        </p:sp>
+      </p:grpSp>
+      <p:sp>
+        <p:nvSpPr>
+          <p:cNvPr id="99" name="TextBox 98">
+            <a:extLst>
+              <a:ext uri="{FF2B5EF4-FFF2-40B4-BE49-F238E27FC236}">
+                <a16:creationId xmlns:a16="http://schemas.microsoft.com/office/drawing/2014/main" id="{30948F43-DFDB-5269-86DD-235955DC8499}"/>
+              </a:ext>
+            </a:extLst>
+          </p:cNvPr>
+          <p:cNvSpPr txBox="1"/>
+          <p:nvPr/>
+        </p:nvSpPr>
+        <p:spPr>
+          <a:xfrm>
+            <a:off x="6920140" y="361183"/>
+            <a:ext cx="691759" cy="338554"/>
+          </a:xfrm>
+          <a:prstGeom prst="rect">
+            <a:avLst/>
+          </a:prstGeom>
+          <a:noFill/>
+        </p:spPr>
+        <p:txBody>
+          <a:bodyPr wrap="square" rtlCol="0">
+            <a:spAutoFit/>
+          </a:bodyPr>
+          <a:lstStyle/>
+          <a:p>
+            <a:r>
+              <a:rPr lang="en-US" altLang="ko-KR" sz="1600" dirty="0">
+                <a:latin typeface="Calibri" panose="020F0502020204030204" pitchFamily="34" charset="0"/>
+                <a:ea typeface="Calibri" panose="020F0502020204030204" pitchFamily="34" charset="0"/>
+                <a:cs typeface="Calibri" panose="020F0502020204030204" pitchFamily="34" charset="0"/>
+              </a:rPr>
+              <a:t>User</a:t>
+            </a:r>
+            <a:endParaRPr lang="ko-KR" altLang="en-US" sz="1600" dirty="0">
+              <a:latin typeface="Calibri" panose="020F0502020204030204" pitchFamily="34" charset="0"/>
+              <a:cs typeface="Calibri" panose="020F0502020204030204" pitchFamily="34" charset="0"/>
+            </a:endParaRPr>
+          </a:p>
+        </p:txBody>
+      </p:sp>
+      <p:cxnSp>
+        <p:nvCxnSpPr>
+          <p:cNvPr id="100" name="연결선: 꺾임 99">
+            <a:extLst>
+              <a:ext uri="{FF2B5EF4-FFF2-40B4-BE49-F238E27FC236}">
+                <a16:creationId xmlns:a16="http://schemas.microsoft.com/office/drawing/2014/main" id="{02DCA9FD-6D2B-8E95-DA75-38775F21290B}"/>
+              </a:ext>
+            </a:extLst>
+          </p:cNvPr>
+          <p:cNvCxnSpPr>
+            <a:cxnSpLocks/>
+          </p:cNvCxnSpPr>
+          <p:nvPr/>
+        </p:nvCxnSpPr>
+        <p:spPr>
+          <a:xfrm rot="5400000" flipH="1" flipV="1">
+            <a:off x="5476097" y="4239825"/>
+            <a:ext cx="2280809" cy="607277"/>
+          </a:xfrm>
+          <a:prstGeom prst="bentConnector3">
+            <a:avLst>
+              <a:gd name="adj1" fmla="val 26162"/>
+            </a:avLst>
+          </a:prstGeom>
+          <a:ln w="12700">
+            <a:solidFill>
+              <a:schemeClr val="tx1"/>
+            </a:solidFill>
+            <a:headEnd w="med" len="lg"/>
+            <a:tailEnd type="arrow"/>
+          </a:ln>
+        </p:spPr>
+        <p:style>
+          <a:lnRef idx="2">
+            <a:schemeClr val="accent1"/>
+          </a:lnRef>
+          <a:fillRef idx="0">
+            <a:schemeClr val="accent1"/>
+          </a:fillRef>
+          <a:effectRef idx="1">
+            <a:schemeClr val="accent1"/>
+          </a:effectRef>
+          <a:fontRef idx="minor">
+            <a:schemeClr val="tx1"/>
+          </a:fontRef>
+        </p:style>
+      </p:cxnSp>
+      <p:cxnSp>
+        <p:nvCxnSpPr>
+          <p:cNvPr id="101" name="연결선: 꺾임 100">
+            <a:extLst>
+              <a:ext uri="{FF2B5EF4-FFF2-40B4-BE49-F238E27FC236}">
+                <a16:creationId xmlns:a16="http://schemas.microsoft.com/office/drawing/2014/main" id="{57328511-FC37-65A8-2D1A-7A5D233B2004}"/>
+              </a:ext>
+            </a:extLst>
+          </p:cNvPr>
+          <p:cNvCxnSpPr>
+            <a:cxnSpLocks/>
+          </p:cNvCxnSpPr>
+          <p:nvPr/>
+        </p:nvCxnSpPr>
+        <p:spPr>
+          <a:xfrm rot="5400000">
+            <a:off x="6398405" y="4409546"/>
+            <a:ext cx="2254866" cy="293778"/>
+          </a:xfrm>
+          <a:prstGeom prst="bentConnector3">
+            <a:avLst>
+              <a:gd name="adj1" fmla="val 50000"/>
+            </a:avLst>
+          </a:prstGeom>
+          <a:ln w="12700">
+            <a:solidFill>
+              <a:schemeClr val="tx1"/>
+            </a:solidFill>
+            <a:headEnd w="med" len="lg"/>
+            <a:tailEnd type="arrow"/>
+          </a:ln>
+        </p:spPr>
+        <p:style>
+          <a:lnRef idx="2">
+            <a:schemeClr val="accent1"/>
+          </a:lnRef>
+          <a:fillRef idx="0">
+            <a:schemeClr val="accent1"/>
+          </a:fillRef>
+          <a:effectRef idx="1">
+            <a:schemeClr val="accent1"/>
+          </a:effectRef>
+          <a:fontRef idx="minor">
+            <a:schemeClr val="tx1"/>
+          </a:fontRef>
+        </p:style>
+      </p:cxnSp>
+      <p:cxnSp>
+        <p:nvCxnSpPr>
+          <p:cNvPr id="102" name="직선 화살표 연결선 101">
+            <a:extLst>
+              <a:ext uri="{FF2B5EF4-FFF2-40B4-BE49-F238E27FC236}">
+                <a16:creationId xmlns:a16="http://schemas.microsoft.com/office/drawing/2014/main" id="{BBB48223-B1B0-3827-1A53-926EEE4DB763}"/>
+              </a:ext>
+            </a:extLst>
+          </p:cNvPr>
+          <p:cNvCxnSpPr>
+            <a:cxnSpLocks/>
+            <a:endCxn id="82" idx="0"/>
+          </p:cNvCxnSpPr>
+          <p:nvPr/>
+        </p:nvCxnSpPr>
+        <p:spPr>
+          <a:xfrm>
+            <a:off x="6792769" y="779522"/>
+            <a:ext cx="0" cy="451291"/>
+          </a:xfrm>
+          <a:prstGeom prst="straightConnector1">
+            <a:avLst/>
+          </a:prstGeom>
+          <a:ln w="12700">
+            <a:solidFill>
+              <a:schemeClr val="tx1"/>
+            </a:solidFill>
+            <a:headEnd type="arrow"/>
+            <a:tailEnd type="arrow"/>
+          </a:ln>
+        </p:spPr>
+        <p:style>
+          <a:lnRef idx="2">
+            <a:schemeClr val="accent1"/>
+          </a:lnRef>
+          <a:fillRef idx="0">
+            <a:schemeClr val="accent1"/>
+          </a:fillRef>
+          <a:effectRef idx="1">
+            <a:schemeClr val="accent1"/>
+          </a:effectRef>
+          <a:fontRef idx="minor">
+            <a:schemeClr val="tx1"/>
+          </a:fontRef>
+        </p:style>
+      </p:cxnSp>
+      <p:sp>
+        <p:nvSpPr>
+          <p:cNvPr id="103" name="TextBox 102">
+            <a:extLst>
+              <a:ext uri="{FF2B5EF4-FFF2-40B4-BE49-F238E27FC236}">
+                <a16:creationId xmlns:a16="http://schemas.microsoft.com/office/drawing/2014/main" id="{EA5A5A86-216F-631B-4826-305D3DC7B596}"/>
+              </a:ext>
+            </a:extLst>
+          </p:cNvPr>
+          <p:cNvSpPr txBox="1"/>
+          <p:nvPr/>
+        </p:nvSpPr>
+        <p:spPr>
+          <a:xfrm>
+            <a:off x="8352968" y="5802847"/>
+            <a:ext cx="1322330" cy="707886"/>
+          </a:xfrm>
+          <a:prstGeom prst="rect">
+            <a:avLst/>
+          </a:prstGeom>
+          <a:noFill/>
+        </p:spPr>
+        <p:txBody>
+          <a:bodyPr wrap="square" rtlCol="0">
+            <a:spAutoFit/>
+          </a:bodyPr>
+          <a:lstStyle/>
+          <a:p>
+            <a:r>
+              <a:rPr lang="en-US" altLang="ko-KR" sz="2000" dirty="0">
+                <a:latin typeface="Calibri" panose="020F0502020204030204" pitchFamily="34" charset="0"/>
+                <a:ea typeface="Calibri" panose="020F0502020204030204" pitchFamily="34" charset="0"/>
+                <a:cs typeface="Calibri" panose="020F0502020204030204" pitchFamily="34" charset="0"/>
+              </a:rPr>
+              <a:t>Camera</a:t>
+            </a:r>
+          </a:p>
+          <a:p>
+            <a:r>
+              <a:rPr lang="en-US" altLang="ko-KR" sz="2000" dirty="0">
+                <a:latin typeface="Calibri" panose="020F0502020204030204" pitchFamily="34" charset="0"/>
+                <a:ea typeface="Calibri" panose="020F0502020204030204" pitchFamily="34" charset="0"/>
+                <a:cs typeface="Calibri" panose="020F0502020204030204" pitchFamily="34" charset="0"/>
+              </a:rPr>
+              <a:t>Layer</a:t>
+            </a:r>
+            <a:endParaRPr lang="ko-KR" altLang="en-US" sz="2000" dirty="0">
+              <a:latin typeface="Calibri" panose="020F0502020204030204" pitchFamily="34" charset="0"/>
+              <a:cs typeface="Calibri" panose="020F0502020204030204" pitchFamily="34" charset="0"/>
+            </a:endParaRPr>
+          </a:p>
+        </p:txBody>
+      </p:sp>
+      <p:sp>
+        <p:nvSpPr>
+          <p:cNvPr id="104" name="TextBox 103">
+            <a:extLst>
+              <a:ext uri="{FF2B5EF4-FFF2-40B4-BE49-F238E27FC236}">
+                <a16:creationId xmlns:a16="http://schemas.microsoft.com/office/drawing/2014/main" id="{64A5D658-BC4B-FAC2-FB9E-5515D9D69587}"/>
+              </a:ext>
+            </a:extLst>
+          </p:cNvPr>
+          <p:cNvSpPr txBox="1"/>
+          <p:nvPr/>
+        </p:nvSpPr>
+        <p:spPr>
+          <a:xfrm>
+            <a:off x="8353340" y="2745403"/>
+            <a:ext cx="1692181" cy="707886"/>
+          </a:xfrm>
+          <a:prstGeom prst="rect">
+            <a:avLst/>
+          </a:prstGeom>
+          <a:noFill/>
+        </p:spPr>
+        <p:txBody>
+          <a:bodyPr wrap="square" rtlCol="0">
+            <a:spAutoFit/>
+          </a:bodyPr>
+          <a:lstStyle/>
+          <a:p>
+            <a:r>
+              <a:rPr lang="en-US" altLang="ko-KR" sz="2000" dirty="0">
+                <a:latin typeface="Calibri" panose="020F0502020204030204" pitchFamily="34" charset="0"/>
+                <a:ea typeface="Calibri" panose="020F0502020204030204" pitchFamily="34" charset="0"/>
+                <a:cs typeface="Calibri" panose="020F0502020204030204" pitchFamily="34" charset="0"/>
+              </a:rPr>
+              <a:t>Application</a:t>
+            </a:r>
+          </a:p>
+          <a:p>
+            <a:r>
+              <a:rPr lang="en-US" altLang="ko-KR" sz="2000" dirty="0">
+                <a:latin typeface="Calibri" panose="020F0502020204030204" pitchFamily="34" charset="0"/>
+                <a:ea typeface="Calibri" panose="020F0502020204030204" pitchFamily="34" charset="0"/>
+                <a:cs typeface="Calibri" panose="020F0502020204030204" pitchFamily="34" charset="0"/>
+              </a:rPr>
+              <a:t>Layer</a:t>
+            </a:r>
+            <a:endParaRPr lang="ko-KR" altLang="en-US" sz="2000" dirty="0">
+              <a:latin typeface="Calibri" panose="020F0502020204030204" pitchFamily="34" charset="0"/>
+              <a:cs typeface="Calibri" panose="020F0502020204030204" pitchFamily="34" charset="0"/>
+            </a:endParaRPr>
+          </a:p>
+        </p:txBody>
+      </p:sp>
+      <p:sp>
+        <p:nvSpPr>
+          <p:cNvPr id="105" name="TextBox 104">
+            <a:extLst>
+              <a:ext uri="{FF2B5EF4-FFF2-40B4-BE49-F238E27FC236}">
+                <a16:creationId xmlns:a16="http://schemas.microsoft.com/office/drawing/2014/main" id="{1CA23633-995F-4861-AD29-3AA3CF57F5EB}"/>
+              </a:ext>
+            </a:extLst>
+          </p:cNvPr>
+          <p:cNvSpPr txBox="1"/>
+          <p:nvPr/>
+        </p:nvSpPr>
+        <p:spPr>
+          <a:xfrm>
+            <a:off x="8353961" y="3924207"/>
+            <a:ext cx="1496692" cy="1015663"/>
+          </a:xfrm>
+          <a:prstGeom prst="rect">
+            <a:avLst/>
+          </a:prstGeom>
+          <a:noFill/>
+        </p:spPr>
+        <p:txBody>
+          <a:bodyPr wrap="square" rtlCol="0">
+            <a:spAutoFit/>
+          </a:bodyPr>
+          <a:lstStyle/>
+          <a:p>
+            <a:r>
+              <a:rPr lang="en-US" altLang="ko-KR" sz="2000" dirty="0">
+                <a:latin typeface="Calibri" panose="020F0502020204030204" pitchFamily="34" charset="0"/>
+                <a:ea typeface="Calibri" panose="020F0502020204030204" pitchFamily="34" charset="0"/>
+                <a:cs typeface="Calibri" panose="020F0502020204030204" pitchFamily="34" charset="0"/>
+              </a:rPr>
+              <a:t>Media</a:t>
+            </a:r>
+          </a:p>
+          <a:p>
+            <a:r>
+              <a:rPr lang="en-US" altLang="ko-KR" sz="2000" dirty="0">
+                <a:latin typeface="Calibri" panose="020F0502020204030204" pitchFamily="34" charset="0"/>
+                <a:ea typeface="Calibri" panose="020F0502020204030204" pitchFamily="34" charset="0"/>
+                <a:cs typeface="Calibri" panose="020F0502020204030204" pitchFamily="34" charset="0"/>
+              </a:rPr>
+              <a:t>Processing</a:t>
+            </a:r>
+          </a:p>
+          <a:p>
+            <a:r>
+              <a:rPr lang="en-US" altLang="ko-KR" sz="2000" dirty="0">
+                <a:latin typeface="Calibri" panose="020F0502020204030204" pitchFamily="34" charset="0"/>
+                <a:ea typeface="Calibri" panose="020F0502020204030204" pitchFamily="34" charset="0"/>
+                <a:cs typeface="Calibri" panose="020F0502020204030204" pitchFamily="34" charset="0"/>
+              </a:rPr>
+              <a:t>Layer</a:t>
+            </a:r>
+            <a:endParaRPr lang="ko-KR" altLang="en-US" sz="2000" dirty="0">
+              <a:latin typeface="Calibri" panose="020F0502020204030204" pitchFamily="34" charset="0"/>
+              <a:cs typeface="Calibri" panose="020F0502020204030204" pitchFamily="34" charset="0"/>
+            </a:endParaRPr>
+          </a:p>
+        </p:txBody>
+      </p:sp>
+      <p:sp>
+        <p:nvSpPr>
+          <p:cNvPr id="106" name="TextBox 105">
+            <a:extLst>
+              <a:ext uri="{FF2B5EF4-FFF2-40B4-BE49-F238E27FC236}">
+                <a16:creationId xmlns:a16="http://schemas.microsoft.com/office/drawing/2014/main" id="{AD1C123C-6319-20E1-305B-4D87F638828E}"/>
+              </a:ext>
+            </a:extLst>
+          </p:cNvPr>
+          <p:cNvSpPr txBox="1"/>
+          <p:nvPr/>
+        </p:nvSpPr>
+        <p:spPr>
+          <a:xfrm>
+            <a:off x="8342262" y="1225550"/>
+            <a:ext cx="918159" cy="707886"/>
+          </a:xfrm>
+          <a:prstGeom prst="rect">
+            <a:avLst/>
+          </a:prstGeom>
+          <a:noFill/>
+        </p:spPr>
+        <p:txBody>
+          <a:bodyPr wrap="square" rtlCol="0">
+            <a:spAutoFit/>
+          </a:bodyPr>
+          <a:lstStyle/>
+          <a:p>
+            <a:r>
+              <a:rPr lang="en-US" altLang="ko-KR" sz="2000" dirty="0">
+                <a:latin typeface="Calibri" panose="020F0502020204030204" pitchFamily="34" charset="0"/>
+                <a:ea typeface="Calibri" panose="020F0502020204030204" pitchFamily="34" charset="0"/>
+                <a:cs typeface="Calibri" panose="020F0502020204030204" pitchFamily="34" charset="0"/>
+              </a:rPr>
+              <a:t>Client</a:t>
+            </a:r>
+          </a:p>
+          <a:p>
+            <a:r>
+              <a:rPr lang="en-US" altLang="ko-KR" sz="2000" dirty="0">
+                <a:latin typeface="Calibri" panose="020F0502020204030204" pitchFamily="34" charset="0"/>
+                <a:ea typeface="Calibri" panose="020F0502020204030204" pitchFamily="34" charset="0"/>
+                <a:cs typeface="Calibri" panose="020F0502020204030204" pitchFamily="34" charset="0"/>
+              </a:rPr>
+              <a:t>Layer</a:t>
+            </a:r>
+            <a:endParaRPr lang="ko-KR" altLang="en-US" sz="2000" dirty="0">
+              <a:latin typeface="Calibri" panose="020F0502020204030204" pitchFamily="34" charset="0"/>
+              <a:cs typeface="Calibri" panose="020F0502020204030204" pitchFamily="34" charset="0"/>
+            </a:endParaRPr>
+          </a:p>
+        </p:txBody>
+      </p:sp>
+      <p:sp>
+        <p:nvSpPr>
+          <p:cNvPr id="107" name="직사각형 106">
+            <a:extLst>
+              <a:ext uri="{FF2B5EF4-FFF2-40B4-BE49-F238E27FC236}">
+                <a16:creationId xmlns:a16="http://schemas.microsoft.com/office/drawing/2014/main" id="{71724C3F-CDF1-7D54-3D12-79CD62AAA139}"/>
+              </a:ext>
+            </a:extLst>
+          </p:cNvPr>
+          <p:cNvSpPr/>
+          <p:nvPr/>
+        </p:nvSpPr>
+        <p:spPr>
+          <a:xfrm>
+            <a:off x="4952999" y="5683867"/>
+            <a:ext cx="3249743" cy="933118"/>
+          </a:xfrm>
+          <a:prstGeom prst="rect">
+            <a:avLst/>
+          </a:prstGeom>
+          <a:noFill/>
+          <a:ln w="28575">
+            <a:solidFill>
+              <a:srgbClr val="FF0000"/>
+            </a:solidFill>
+            <a:prstDash val="dash"/>
+          </a:ln>
+        </p:spPr>
+        <p:style>
+          <a:lnRef idx="2">
+            <a:schemeClr val="accent1">
+              <a:shade val="15000"/>
+            </a:schemeClr>
+          </a:lnRef>
+          <a:fillRef idx="1">
+            <a:schemeClr val="accent1"/>
+          </a:fillRef>
+          <a:effectRef idx="0">
+            <a:schemeClr val="accent1"/>
+          </a:effectRef>
+          <a:fontRef idx="minor">
+            <a:schemeClr val="lt1"/>
+          </a:fontRef>
+        </p:style>
+        <p:txBody>
+          <a:bodyPr rtlCol="0" anchor="ctr"/>
+          <a:lstStyle/>
+          <a:p>
+            <a:pPr algn="ctr"/>
+            <a:endParaRPr lang="ko-KR" altLang="en-US"/>
+          </a:p>
+        </p:txBody>
+      </p:sp>
+      <p:sp>
+        <p:nvSpPr>
+          <p:cNvPr id="108" name="직사각형 107">
+            <a:extLst>
+              <a:ext uri="{FF2B5EF4-FFF2-40B4-BE49-F238E27FC236}">
+                <a16:creationId xmlns:a16="http://schemas.microsoft.com/office/drawing/2014/main" id="{3A94368C-35B8-509D-6656-91BAAFEA6343}"/>
+              </a:ext>
+            </a:extLst>
+          </p:cNvPr>
+          <p:cNvSpPr/>
+          <p:nvPr/>
+        </p:nvSpPr>
+        <p:spPr>
+          <a:xfrm>
+            <a:off x="4952999" y="2402189"/>
+            <a:ext cx="3260819" cy="1204745"/>
+          </a:xfrm>
+          <a:prstGeom prst="rect">
+            <a:avLst/>
+          </a:prstGeom>
+          <a:noFill/>
+          <a:ln w="28575">
+            <a:solidFill>
+              <a:srgbClr val="00B050"/>
+            </a:solidFill>
+            <a:prstDash val="dash"/>
+          </a:ln>
+        </p:spPr>
+        <p:style>
+          <a:lnRef idx="2">
+            <a:schemeClr val="accent1">
+              <a:shade val="15000"/>
+            </a:schemeClr>
+          </a:lnRef>
+          <a:fillRef idx="1">
+            <a:schemeClr val="accent1"/>
+          </a:fillRef>
+          <a:effectRef idx="0">
+            <a:schemeClr val="accent1"/>
+          </a:effectRef>
+          <a:fontRef idx="minor">
+            <a:schemeClr val="lt1"/>
+          </a:fontRef>
+        </p:style>
+        <p:txBody>
+          <a:bodyPr rtlCol="0" anchor="ctr"/>
+          <a:lstStyle/>
+          <a:p>
+            <a:pPr algn="ctr"/>
+            <a:endParaRPr lang="ko-KR" altLang="en-US"/>
+          </a:p>
+        </p:txBody>
+      </p:sp>
+      <p:sp>
+        <p:nvSpPr>
+          <p:cNvPr id="109" name="직사각형 108">
+            <a:extLst>
+              <a:ext uri="{FF2B5EF4-FFF2-40B4-BE49-F238E27FC236}">
+                <a16:creationId xmlns:a16="http://schemas.microsoft.com/office/drawing/2014/main" id="{DA85C43C-094C-7E58-53DC-050D91FF9D8F}"/>
+              </a:ext>
+            </a:extLst>
+          </p:cNvPr>
+          <p:cNvSpPr/>
+          <p:nvPr/>
+        </p:nvSpPr>
+        <p:spPr>
+          <a:xfrm>
+            <a:off x="4952999" y="1124717"/>
+            <a:ext cx="3231316" cy="873754"/>
+          </a:xfrm>
+          <a:prstGeom prst="rect">
+            <a:avLst/>
+          </a:prstGeom>
+          <a:noFill/>
+          <a:ln w="28575">
+            <a:solidFill>
+              <a:srgbClr val="0070C0"/>
+            </a:solidFill>
+            <a:prstDash val="dash"/>
+          </a:ln>
+        </p:spPr>
+        <p:style>
+          <a:lnRef idx="2">
+            <a:schemeClr val="accent1">
+              <a:shade val="15000"/>
+            </a:schemeClr>
+          </a:lnRef>
+          <a:fillRef idx="1">
+            <a:schemeClr val="accent1"/>
+          </a:fillRef>
+          <a:effectRef idx="0">
+            <a:schemeClr val="accent1"/>
+          </a:effectRef>
+          <a:fontRef idx="minor">
+            <a:schemeClr val="lt1"/>
+          </a:fontRef>
+        </p:style>
+        <p:txBody>
+          <a:bodyPr rtlCol="0" anchor="ctr"/>
+          <a:lstStyle/>
+          <a:p>
+            <a:pPr algn="ctr"/>
+            <a:endParaRPr lang="ko-KR" altLang="en-US"/>
+          </a:p>
+        </p:txBody>
+      </p:sp>
+      <p:sp>
+        <p:nvSpPr>
+          <p:cNvPr id="110" name="직사각형 109">
+            <a:extLst>
+              <a:ext uri="{FF2B5EF4-FFF2-40B4-BE49-F238E27FC236}">
+                <a16:creationId xmlns:a16="http://schemas.microsoft.com/office/drawing/2014/main" id="{535168B9-96C5-FABB-BB0F-674D559D7FFC}"/>
+              </a:ext>
+            </a:extLst>
+          </p:cNvPr>
+          <p:cNvSpPr/>
+          <p:nvPr/>
+        </p:nvSpPr>
+        <p:spPr>
+          <a:xfrm>
+            <a:off x="4953000" y="3875531"/>
+            <a:ext cx="3249741" cy="1074083"/>
+          </a:xfrm>
+          <a:prstGeom prst="rect">
+            <a:avLst/>
+          </a:prstGeom>
+          <a:noFill/>
+          <a:ln w="28575">
+            <a:solidFill>
+              <a:schemeClr val="accent2">
+                <a:lumMod val="75000"/>
+              </a:schemeClr>
+            </a:solidFill>
+            <a:prstDash val="dash"/>
+          </a:ln>
+        </p:spPr>
+        <p:style>
+          <a:lnRef idx="2">
+            <a:schemeClr val="accent1">
+              <a:shade val="15000"/>
+            </a:schemeClr>
+          </a:lnRef>
+          <a:fillRef idx="1">
+            <a:schemeClr val="accent1"/>
+          </a:fillRef>
+          <a:effectRef idx="0">
+            <a:schemeClr val="accent1"/>
+          </a:effectRef>
+          <a:fontRef idx="minor">
+            <a:schemeClr val="lt1"/>
+          </a:fontRef>
+        </p:style>
+        <p:txBody>
+          <a:bodyPr rtlCol="0" anchor="ctr"/>
+          <a:lstStyle/>
+          <a:p>
+            <a:pPr algn="ctr"/>
+            <a:endParaRPr lang="ko-KR" altLang="en-US"/>
+          </a:p>
+        </p:txBody>
+      </p:sp>
+      <p:sp>
+        <p:nvSpPr>
+          <p:cNvPr id="175" name="내용 개체 틀 2">
+            <a:extLst>
+              <a:ext uri="{FF2B5EF4-FFF2-40B4-BE49-F238E27FC236}">
+                <a16:creationId xmlns:a16="http://schemas.microsoft.com/office/drawing/2014/main" id="{25BD6D47-131B-7E6C-4FFF-66005F61A37E}"/>
+              </a:ext>
+            </a:extLst>
+          </p:cNvPr>
+          <p:cNvSpPr>
+            <a:spLocks noGrp="1"/>
+          </p:cNvSpPr>
+          <p:nvPr>
+            <p:ph idx="1"/>
+          </p:nvPr>
+        </p:nvSpPr>
+        <p:spPr>
+          <a:xfrm>
+            <a:off x="167769" y="1513669"/>
+            <a:ext cx="3693459" cy="772920"/>
+          </a:xfrm>
+        </p:spPr>
+        <p:txBody>
+          <a:bodyPr>
+            <a:normAutofit/>
+          </a:bodyPr>
+          <a:lstStyle/>
+          <a:p>
+            <a:pPr marL="0" indent="0">
+              <a:lnSpc>
+                <a:spcPct val="150000"/>
+              </a:lnSpc>
+              <a:buNone/>
+            </a:pPr>
+            <a:r>
+              <a:rPr lang="en-US" altLang="ko-KR" dirty="0">
+                <a:latin typeface="Calibri" panose="020F0502020204030204" pitchFamily="34" charset="0"/>
+                <a:ea typeface="Calibri" panose="020F0502020204030204" pitchFamily="34" charset="0"/>
+                <a:cs typeface="Calibri" panose="020F0502020204030204" pitchFamily="34" charset="0"/>
+              </a:rPr>
+              <a:t>[4-Layer Architecture]</a:t>
+            </a:r>
+            <a:endParaRPr lang="ko-KR" altLang="en-US" dirty="0">
+              <a:latin typeface="Calibri" panose="020F0502020204030204" pitchFamily="34" charset="0"/>
+              <a:cs typeface="Calibri" panose="020F0502020204030204" pitchFamily="34" charset="0"/>
+            </a:endParaRPr>
+          </a:p>
+        </p:txBody>
+      </p:sp>
+      <p:sp>
+        <p:nvSpPr>
+          <p:cNvPr id="176" name="내용 개체 틀 2">
+            <a:extLst>
+              <a:ext uri="{FF2B5EF4-FFF2-40B4-BE49-F238E27FC236}">
+                <a16:creationId xmlns:a16="http://schemas.microsoft.com/office/drawing/2014/main" id="{51E2E19D-090F-2F97-2C7A-38A2A96F0756}"/>
+              </a:ext>
+            </a:extLst>
+          </p:cNvPr>
+          <p:cNvSpPr txBox="1">
+            <a:spLocks/>
+          </p:cNvSpPr>
+          <p:nvPr/>
+        </p:nvSpPr>
+        <p:spPr>
+          <a:xfrm>
+            <a:off x="191182" y="2392850"/>
+            <a:ext cx="9487390" cy="3859010"/>
+          </a:xfrm>
+          <a:prstGeom prst="rect">
+            <a:avLst/>
+          </a:prstGeom>
+        </p:spPr>
+        <p:txBody>
+          <a:bodyPr vert="horz" lIns="91440" tIns="45720" rIns="91440" bIns="45720" rtlCol="0">
+            <a:normAutofit/>
+          </a:bodyPr>
+          <a:lstStyle>
+            <a:lvl1pPr marL="228600" indent="-228600" algn="l" defTabSz="914400" rtl="0" eaLnBrk="1" latinLnBrk="1" hangingPunct="1">
+              <a:lnSpc>
+                <a:spcPct val="90000"/>
+              </a:lnSpc>
+              <a:spcBef>
+                <a:spcPts val="1000"/>
+              </a:spcBef>
+              <a:buFont typeface="Arial" panose="020B0604020202020204" pitchFamily="34" charset="0"/>
+              <a:buChar char="•"/>
+              <a:defRPr sz="2800" kern="1200">
+                <a:solidFill>
+                  <a:schemeClr val="tx1"/>
+                </a:solidFill>
+                <a:latin typeface="나눔바른고딕" panose="020B0603020101020101" pitchFamily="50" charset="-127"/>
+                <a:ea typeface="나눔바른고딕" panose="020B0603020101020101" pitchFamily="50" charset="-127"/>
+                <a:cs typeface="+mn-cs"/>
+              </a:defRPr>
+            </a:lvl1pPr>
+            <a:lvl2pPr marL="685800" indent="-228600" algn="l" defTabSz="914400" rtl="0" eaLnBrk="1" latinLnBrk="1" hangingPunct="1">
+              <a:lnSpc>
+                <a:spcPct val="90000"/>
+              </a:lnSpc>
+              <a:spcBef>
+                <a:spcPts val="500"/>
+              </a:spcBef>
+              <a:buFont typeface="Arial" panose="020B0604020202020204" pitchFamily="34" charset="0"/>
+              <a:buChar char="•"/>
+              <a:defRPr sz="2400" kern="1200">
+                <a:solidFill>
+                  <a:schemeClr val="tx1"/>
+                </a:solidFill>
+                <a:latin typeface="나눔바른고딕" panose="020B0603020101020101" pitchFamily="50" charset="-127"/>
+                <a:ea typeface="나눔바른고딕" panose="020B0603020101020101" pitchFamily="50" charset="-127"/>
+                <a:cs typeface="+mn-cs"/>
+              </a:defRPr>
+            </a:lvl2pPr>
+            <a:lvl3pPr marL="1143000" indent="-228600" algn="l" defTabSz="914400" rtl="0" eaLnBrk="1" latinLnBrk="1" hangingPunct="1">
+              <a:lnSpc>
+                <a:spcPct val="90000"/>
+              </a:lnSpc>
+              <a:spcBef>
+                <a:spcPts val="500"/>
+              </a:spcBef>
+              <a:buFont typeface="Arial" panose="020B0604020202020204" pitchFamily="34" charset="0"/>
+              <a:buChar char="•"/>
+              <a:defRPr sz="2000" kern="1200">
+                <a:solidFill>
+                  <a:schemeClr val="tx1"/>
+                </a:solidFill>
+                <a:latin typeface="나눔바른고딕" panose="020B0603020101020101" pitchFamily="50" charset="-127"/>
+                <a:ea typeface="나눔바른고딕" panose="020B0603020101020101" pitchFamily="50" charset="-127"/>
+                <a:cs typeface="+mn-cs"/>
+              </a:defRPr>
+            </a:lvl3pPr>
+            <a:lvl4pPr marL="1600200" indent="-228600" algn="l" defTabSz="914400" rtl="0" eaLnBrk="1" latinLnBrk="1" hangingPunct="1">
+              <a:lnSpc>
+                <a:spcPct val="90000"/>
+              </a:lnSpc>
+              <a:spcBef>
+                <a:spcPts val="500"/>
+              </a:spcBef>
+              <a:buFont typeface="Arial" panose="020B0604020202020204" pitchFamily="34" charset="0"/>
+              <a:buChar char="•"/>
+              <a:defRPr sz="1800" kern="1200">
+                <a:solidFill>
+                  <a:schemeClr val="tx1"/>
+                </a:solidFill>
+                <a:latin typeface="나눔바른고딕" panose="020B0603020101020101" pitchFamily="50" charset="-127"/>
+                <a:ea typeface="나눔바른고딕" panose="020B0603020101020101" pitchFamily="50" charset="-127"/>
+                <a:cs typeface="+mn-cs"/>
+              </a:defRPr>
+            </a:lvl4pPr>
+            <a:lvl5pPr marL="2057400" indent="-228600" algn="l" defTabSz="914400" rtl="0" eaLnBrk="1" latinLnBrk="1" hangingPunct="1">
+              <a:lnSpc>
+                <a:spcPct val="90000"/>
+              </a:lnSpc>
+              <a:spcBef>
+                <a:spcPts val="500"/>
+              </a:spcBef>
+              <a:buFont typeface="Arial" panose="020B0604020202020204" pitchFamily="34" charset="0"/>
+              <a:buChar char="•"/>
+              <a:defRPr sz="1800" kern="1200">
+                <a:solidFill>
+                  <a:schemeClr val="tx1"/>
+                </a:solidFill>
+                <a:latin typeface="나눔바른고딕" panose="020B0603020101020101" pitchFamily="50" charset="-127"/>
+                <a:ea typeface="나눔바른고딕" panose="020B0603020101020101" pitchFamily="50" charset="-127"/>
+                <a:cs typeface="+mn-cs"/>
+              </a:defRPr>
+            </a:lvl5pPr>
+            <a:lvl6pPr marL="2514600" indent="-228600" algn="l" defTabSz="914400" rtl="0" eaLnBrk="1" latinLnBrk="1" hangingPunct="1">
+              <a:lnSpc>
+                <a:spcPct val="90000"/>
+              </a:lnSpc>
+              <a:spcBef>
+                <a:spcPts val="500"/>
+              </a:spcBef>
+              <a:buFont typeface="Arial" panose="020B0604020202020204" pitchFamily="34" charset="0"/>
+              <a:buChar char="•"/>
+              <a:defRPr sz="1800" kern="1200">
+                <a:solidFill>
+                  <a:schemeClr val="tx1"/>
+                </a:solidFill>
+                <a:latin typeface="+mn-lt"/>
+                <a:ea typeface="+mn-ea"/>
+                <a:cs typeface="+mn-cs"/>
+              </a:defRPr>
+            </a:lvl6pPr>
+            <a:lvl7pPr marL="2971800" indent="-228600" algn="l" defTabSz="914400" rtl="0" eaLnBrk="1" latinLnBrk="1" hangingPunct="1">
+              <a:lnSpc>
+                <a:spcPct val="90000"/>
+              </a:lnSpc>
+              <a:spcBef>
+                <a:spcPts val="500"/>
+              </a:spcBef>
+              <a:buFont typeface="Arial" panose="020B0604020202020204" pitchFamily="34" charset="0"/>
+              <a:buChar char="•"/>
+              <a:defRPr sz="1800" kern="1200">
+                <a:solidFill>
+                  <a:schemeClr val="tx1"/>
+                </a:solidFill>
+                <a:latin typeface="+mn-lt"/>
+                <a:ea typeface="+mn-ea"/>
+                <a:cs typeface="+mn-cs"/>
+              </a:defRPr>
+            </a:lvl7pPr>
+            <a:lvl8pPr marL="3429000" indent="-228600" algn="l" defTabSz="914400" rtl="0" eaLnBrk="1" latinLnBrk="1" hangingPunct="1">
+              <a:lnSpc>
+                <a:spcPct val="90000"/>
+              </a:lnSpc>
+              <a:spcBef>
+                <a:spcPts val="500"/>
+              </a:spcBef>
+              <a:buFont typeface="Arial" panose="020B0604020202020204" pitchFamily="34" charset="0"/>
+              <a:buChar char="•"/>
+              <a:defRPr sz="1800" kern="1200">
+                <a:solidFill>
+                  <a:schemeClr val="tx1"/>
+                </a:solidFill>
+                <a:latin typeface="+mn-lt"/>
+                <a:ea typeface="+mn-ea"/>
+                <a:cs typeface="+mn-cs"/>
+              </a:defRPr>
+            </a:lvl8pPr>
+            <a:lvl9pPr marL="3886200" indent="-228600" algn="l" defTabSz="914400" rtl="0" eaLnBrk="1" latinLnBrk="1" hangingPunct="1">
+              <a:lnSpc>
+                <a:spcPct val="90000"/>
+              </a:lnSpc>
+              <a:spcBef>
+                <a:spcPts val="500"/>
+              </a:spcBef>
+              <a:buFont typeface="Arial" panose="020B0604020202020204" pitchFamily="34" charset="0"/>
+              <a:buChar char="•"/>
+              <a:defRPr sz="1800" kern="1200">
+                <a:solidFill>
+                  <a:schemeClr val="tx1"/>
+                </a:solidFill>
+                <a:latin typeface="+mn-lt"/>
+                <a:ea typeface="+mn-ea"/>
+                <a:cs typeface="+mn-cs"/>
+              </a:defRPr>
+            </a:lvl9pPr>
+          </a:lstStyle>
+          <a:p>
+            <a:pPr>
+              <a:lnSpc>
+                <a:spcPct val="150000"/>
+              </a:lnSpc>
+            </a:pPr>
+            <a:r>
+              <a:rPr lang="en-US" altLang="ko-KR" sz="2000" dirty="0"/>
+              <a:t>Client Layer</a:t>
+            </a:r>
+          </a:p>
+          <a:p>
+            <a:pPr>
+              <a:lnSpc>
+                <a:spcPct val="150000"/>
+              </a:lnSpc>
+            </a:pPr>
+            <a:r>
+              <a:rPr lang="en-US" altLang="ko-KR" sz="2000" dirty="0"/>
+              <a:t>Application Layer</a:t>
+            </a:r>
+          </a:p>
+          <a:p>
+            <a:pPr>
+              <a:lnSpc>
+                <a:spcPct val="150000"/>
+              </a:lnSpc>
+            </a:pPr>
+            <a:r>
+              <a:rPr lang="en-US" altLang="ko-KR" sz="2000" dirty="0"/>
+              <a:t>Media Processing Layer</a:t>
+            </a:r>
+          </a:p>
+          <a:p>
+            <a:pPr>
+              <a:lnSpc>
+                <a:spcPct val="150000"/>
+              </a:lnSpc>
+            </a:pPr>
+            <a:r>
+              <a:rPr lang="en-US" altLang="ko-KR" sz="2000" dirty="0"/>
+              <a:t>Camera Layer</a:t>
+            </a:r>
           </a:p>
         </p:txBody>
       </p:sp>
@@ -5198,7 +7870,11 @@
           <a:bodyPr/>
           <a:lstStyle/>
           <a:p>
-            <a:endParaRPr lang="ko-KR" altLang="en-US"/>
+            <a:r>
+              <a:rPr lang="en-US" altLang="ko-KR" dirty="0"/>
+              <a:t>Results</a:t>
+            </a:r>
+            <a:endParaRPr lang="ko-KR" altLang="en-US" dirty="0"/>
           </a:p>
         </p:txBody>
       </p:sp>
@@ -5307,7 +7983,11 @@
           <a:bodyPr/>
           <a:lstStyle/>
           <a:p>
-            <a:endParaRPr lang="ko-KR" altLang="en-US"/>
+            <a:r>
+              <a:rPr lang="en-US" altLang="ko-KR" dirty="0"/>
+              <a:t>Results</a:t>
+            </a:r>
+            <a:endParaRPr lang="ko-KR" altLang="en-US" dirty="0"/>
           </a:p>
         </p:txBody>
       </p:sp>
@@ -5416,7 +8096,11 @@
           <a:bodyPr/>
           <a:lstStyle/>
           <a:p>
-            <a:endParaRPr lang="ko-KR" altLang="en-US"/>
+            <a:r>
+              <a:rPr lang="en-US" altLang="ko-KR" dirty="0"/>
+              <a:t>Results</a:t>
+            </a:r>
+            <a:endParaRPr lang="ko-KR" altLang="en-US" dirty="0"/>
           </a:p>
         </p:txBody>
       </p:sp>
@@ -5525,7 +8209,11 @@
           <a:bodyPr/>
           <a:lstStyle/>
           <a:p>
-            <a:endParaRPr lang="ko-KR" altLang="en-US"/>
+            <a:r>
+              <a:rPr lang="en-US" altLang="ko-KR" dirty="0"/>
+              <a:t>Conclusion</a:t>
+            </a:r>
+            <a:endParaRPr lang="ko-KR" altLang="en-US" dirty="0"/>
           </a:p>
         </p:txBody>
       </p:sp>
@@ -5634,6 +8322,10 @@
           <a:bodyPr/>
           <a:lstStyle/>
           <a:p>
+            <a:r>
+              <a:rPr lang="en-US" altLang="ko-KR" dirty="0"/>
+              <a:t>Reference</a:t>
+            </a:r>
             <a:endParaRPr lang="ko-KR" altLang="en-US" dirty="0"/>
           </a:p>
         </p:txBody>
